--- a/Courses/145060/units/unit-03-repetition-text-adventure/04-slides/exports/MCCTC_145060_Slides_W06_WhileLoops.pptx
+++ b/Courses/145060/units/unit-03-repetition-text-adventure/04-slides/exports/MCCTC_145060_Slides_W06_WhileLoops.pptx
@@ -28,12 +28,16 @@
       <p:regular r:id="rId201314"/>
     </p:embeddedFont>
     <p:embeddedFont>
-      <p:font typeface="Roboto Condensed Bold"/>
+      <p:font typeface="Orbitron"/>
       <p:regular r:id="rId201315"/>
     </p:embeddedFont>
     <p:embeddedFont>
+      <p:font typeface="Roboto Condensed Bold"/>
+      <p:regular r:id="rId201316"/>
+    </p:embeddedFont>
+    <p:embeddedFont>
       <p:font typeface="Roboto Condensed"/>
-      <p:regular r:id="rId201316"/>
+      <p:regular r:id="rId201317"/>
     </p:embeddedFont>
   </p:embeddedFontLst>
   <p:defaultTextStyle>
@@ -702,7 +706,7 @@
           <a:p>
             <a:r>
               <a:rPr lang="en-US" dirty="0"/>
-              <a:t>Build 1 turns yesterday's pseudocode into your first real loop. No rooms yet. A while playing loop that reads a command, where move adds one toward a five move storm limit, quit sets playing to False, and anything else says it is not a command. Count your iterations. Five moves should end the game on the fifth, not the fourth or sixth. Build 2 is this week's Gate 2, reviewing AI code built from Unit 2 decisions, and it is due by the end of the block.</a:t>
+              <a:t>Build 1 turns yesterday's pseudocode into your first real loop. No rooms yet. A while playing loop that reads a command, where move adds one toward a five move storm limit, quit sets playing to False, and anything else says it is not a command. Count your iterations. Five moves should end the game on the fifth, not the fourth or sixth. Build 2 is loop tracing: answer the three self-check questions in the notes, then fill in a trace table for your storm loop before you run it. Tomorrow, Friday, is this week's Gate 2.</a:t>
             </a:r>
             <a:endParaRPr lang="en-US" dirty="0"/>
           </a:p>
@@ -1937,7 +1941,7 @@
         </p:nvSpPr>
         <p:spPr>
           <a:xfrm>
-            <a:off x="661475" y="1853505"/>
+            <a:off x="661475" y="1658342"/>
             <a:ext cx="10868745" cy="590649"/>
           </a:xfrm>
           <a:prstGeom prst="rect">
@@ -1971,46 +1975,43 @@
           </a:p>
         </p:txBody>
       </p:sp>
-      <p:pic>
-        <p:nvPicPr>
-          <p:cNvPr id="3" name="Image 0" descr="preencoded.png">    </p:cNvPr>
-          <p:cNvPicPr>
-            <a:picLocks noChangeAspect="1"/>
-          </p:cNvPicPr>
-          <p:nvPr/>
-        </p:nvPicPr>
-        <p:blipFill>
-          <a:blip r:embed="rId1">
-            <a:extLst>
-              <a:ext uri="{96DAC541-7B7A-43D3-8B79-37D633B846F1}">
-                <asvg:svgBlip xmlns:asvg="http://schemas.microsoft.com/office/drawing/2016/SVG/main" r:embed="rId2"/>
-              </a:ext>
-            </a:extLst>
-          </a:blip>
-          <a:stretch>
-            <a:fillRect/>
-          </a:stretch>
-        </p:blipFill>
-        <p:spPr>
-          <a:xfrm>
-            <a:off x="661475" y="2822178"/>
-            <a:ext cx="5339820" cy="1146274"/>
-          </a:xfrm>
-          <a:prstGeom prst="rect">
-            <a:avLst/>
-          </a:prstGeom>
-        </p:spPr>
-      </p:pic>
-      <p:sp>
-        <p:nvSpPr>
-          <p:cNvPr id="4" name="Text 1"/>
-          <p:cNvSpPr/>
-          <p:nvPr/>
-        </p:nvSpPr>
-        <p:spPr>
-          <a:xfrm>
-            <a:off x="977479" y="3036590"/>
-            <a:ext cx="4809409" cy="295275"/>
+      <p:sp>
+        <p:nvSpPr>
+          <p:cNvPr id="3" name="Shape 1"/>
+          <p:cNvSpPr/>
+          <p:nvPr/>
+        </p:nvSpPr>
+        <p:spPr>
+          <a:xfrm>
+            <a:off x="661475" y="2627015"/>
+            <a:ext cx="5339820" cy="1133574"/>
+          </a:xfrm>
+          <a:prstGeom prst="roundRect">
+            <a:avLst>
+              <a:gd name="adj" fmla="val 7003"/>
+            </a:avLst>
+          </a:prstGeom>
+          <a:solidFill>
+            <a:srgbClr val="D1E5FA"/>
+          </a:solidFill>
+          <a:ln w="19050">
+            <a:solidFill>
+              <a:srgbClr val="B7CBE0"/>
+            </a:solidFill>
+            <a:prstDash val="solid"/>
+          </a:ln>
+        </p:spPr>
+      </p:sp>
+      <p:sp>
+        <p:nvSpPr>
+          <p:cNvPr id="4" name="Text 2"/>
+          <p:cNvSpPr/>
+          <p:nvPr/>
+        </p:nvSpPr>
+        <p:spPr>
+          <a:xfrm>
+            <a:off x="869531" y="2835077"/>
+            <a:ext cx="4923707" cy="295275"/>
           </a:xfrm>
           <a:prstGeom prst="rect">
             <a:avLst/>
@@ -2045,14 +2046,14 @@
       </p:sp>
       <p:sp>
         <p:nvSpPr>
-          <p:cNvPr id="5" name="Text 2"/>
-          <p:cNvSpPr/>
-          <p:nvPr/>
-        </p:nvSpPr>
-        <p:spPr>
-          <a:xfrm>
-            <a:off x="977479" y="3445272"/>
-            <a:ext cx="4809409" cy="308769"/>
+          <p:cNvPr id="5" name="Text 3"/>
+          <p:cNvSpPr/>
+          <p:nvPr/>
+        </p:nvSpPr>
+        <p:spPr>
+          <a:xfrm>
+            <a:off x="869531" y="3243759"/>
+            <a:ext cx="4923707" cy="308769"/>
           </a:xfrm>
           <a:prstGeom prst="rect">
             <a:avLst/>
@@ -2105,46 +2106,43 @@
           </a:p>
         </p:txBody>
       </p:sp>
-      <p:pic>
-        <p:nvPicPr>
-          <p:cNvPr id="6" name="Image 1" descr="preencoded.png">    </p:cNvPr>
-          <p:cNvPicPr>
-            <a:picLocks noChangeAspect="1"/>
-          </p:cNvPicPr>
-          <p:nvPr/>
-        </p:nvPicPr>
-        <p:blipFill>
-          <a:blip r:embed="rId3">
-            <a:extLst>
-              <a:ext uri="{96DAC541-7B7A-43D3-8B79-37D633B846F1}">
-                <asvg:svgBlip xmlns:asvg="http://schemas.microsoft.com/office/drawing/2016/SVG/main" r:embed="rId4"/>
-              </a:ext>
-            </a:extLst>
-          </a:blip>
-          <a:stretch>
-            <a:fillRect/>
-          </a:stretch>
-        </p:blipFill>
-        <p:spPr>
-          <a:xfrm>
-            <a:off x="6190301" y="2822178"/>
-            <a:ext cx="5339919" cy="1146274"/>
-          </a:xfrm>
-          <a:prstGeom prst="rect">
-            <a:avLst/>
-          </a:prstGeom>
-        </p:spPr>
-      </p:pic>
-      <p:sp>
-        <p:nvSpPr>
-          <p:cNvPr id="7" name="Text 3"/>
-          <p:cNvSpPr/>
-          <p:nvPr/>
-        </p:nvSpPr>
-        <p:spPr>
-          <a:xfrm>
-            <a:off x="6506305" y="3036590"/>
-            <a:ext cx="4809509" cy="295275"/>
+      <p:sp>
+        <p:nvSpPr>
+          <p:cNvPr id="6" name="Shape 4"/>
+          <p:cNvSpPr/>
+          <p:nvPr/>
+        </p:nvSpPr>
+        <p:spPr>
+          <a:xfrm>
+            <a:off x="6190301" y="2627015"/>
+            <a:ext cx="5339919" cy="1133574"/>
+          </a:xfrm>
+          <a:prstGeom prst="roundRect">
+            <a:avLst>
+              <a:gd name="adj" fmla="val 7003"/>
+            </a:avLst>
+          </a:prstGeom>
+          <a:solidFill>
+            <a:srgbClr val="D1E5FA"/>
+          </a:solidFill>
+          <a:ln w="19050">
+            <a:solidFill>
+              <a:srgbClr val="B7CBE0"/>
+            </a:solidFill>
+            <a:prstDash val="solid"/>
+          </a:ln>
+        </p:spPr>
+      </p:sp>
+      <p:sp>
+        <p:nvSpPr>
+          <p:cNvPr id="7" name="Text 5"/>
+          <p:cNvSpPr/>
+          <p:nvPr/>
+        </p:nvSpPr>
+        <p:spPr>
+          <a:xfrm>
+            <a:off x="6398358" y="2835077"/>
+            <a:ext cx="4923806" cy="295275"/>
           </a:xfrm>
           <a:prstGeom prst="rect">
             <a:avLst/>
@@ -2179,14 +2177,14 @@
       </p:sp>
       <p:sp>
         <p:nvSpPr>
-          <p:cNvPr id="8" name="Text 4"/>
-          <p:cNvSpPr/>
-          <p:nvPr/>
-        </p:nvSpPr>
-        <p:spPr>
-          <a:xfrm>
-            <a:off x="6506305" y="3445272"/>
-            <a:ext cx="4809509" cy="308769"/>
+          <p:cNvPr id="8" name="Text 6"/>
+          <p:cNvSpPr/>
+          <p:nvPr/>
+        </p:nvSpPr>
+        <p:spPr>
+          <a:xfrm>
+            <a:off x="6398358" y="3243759"/>
+            <a:ext cx="4923806" cy="308769"/>
           </a:xfrm>
           <a:prstGeom prst="rect">
             <a:avLst/>
@@ -2222,46 +2220,43 @@
           </a:p>
         </p:txBody>
       </p:sp>
-      <p:pic>
-        <p:nvPicPr>
-          <p:cNvPr id="9" name="Image 2" descr="preencoded.png">    </p:cNvPr>
-          <p:cNvPicPr>
-            <a:picLocks noChangeAspect="1"/>
-          </p:cNvPicPr>
-          <p:nvPr/>
-        </p:nvPicPr>
-        <p:blipFill>
-          <a:blip r:embed="rId5">
-            <a:extLst>
-              <a:ext uri="{96DAC541-7B7A-43D3-8B79-37D633B846F1}">
-                <asvg:svgBlip xmlns:asvg="http://schemas.microsoft.com/office/drawing/2016/SVG/main" r:embed="rId6"/>
-              </a:ext>
-            </a:extLst>
-          </a:blip>
-          <a:stretch>
-            <a:fillRect/>
-          </a:stretch>
-        </p:blipFill>
-        <p:spPr>
-          <a:xfrm>
-            <a:off x="661475" y="4157464"/>
-            <a:ext cx="5339820" cy="724098"/>
-          </a:xfrm>
-          <a:prstGeom prst="rect">
-            <a:avLst/>
-          </a:prstGeom>
-        </p:spPr>
-      </p:pic>
-      <p:sp>
-        <p:nvSpPr>
-          <p:cNvPr id="10" name="Text 5"/>
-          <p:cNvSpPr/>
-          <p:nvPr/>
-        </p:nvSpPr>
-        <p:spPr>
-          <a:xfrm>
-            <a:off x="977479" y="4371876"/>
-            <a:ext cx="4809409" cy="295275"/>
+      <p:sp>
+        <p:nvSpPr>
+          <p:cNvPr id="9" name="Shape 7"/>
+          <p:cNvSpPr/>
+          <p:nvPr/>
+        </p:nvSpPr>
+        <p:spPr>
+          <a:xfrm>
+            <a:off x="661475" y="3949601"/>
+            <a:ext cx="5339820" cy="1127224"/>
+          </a:xfrm>
+          <a:prstGeom prst="roundRect">
+            <a:avLst>
+              <a:gd name="adj" fmla="val 7043"/>
+            </a:avLst>
+          </a:prstGeom>
+          <a:solidFill>
+            <a:srgbClr val="D1E5FA"/>
+          </a:solidFill>
+          <a:ln w="19050">
+            <a:solidFill>
+              <a:srgbClr val="B7CBE0"/>
+            </a:solidFill>
+            <a:prstDash val="solid"/>
+          </a:ln>
+        </p:spPr>
+      </p:sp>
+      <p:sp>
+        <p:nvSpPr>
+          <p:cNvPr id="10" name="Text 8"/>
+          <p:cNvSpPr/>
+          <p:nvPr/>
+        </p:nvSpPr>
+        <p:spPr>
+          <a:xfrm>
+            <a:off x="869531" y="4157662"/>
+            <a:ext cx="4923707" cy="295275"/>
           </a:xfrm>
           <a:prstGeom prst="rect">
             <a:avLst/>
@@ -2294,46 +2289,85 @@
           </a:p>
         </p:txBody>
       </p:sp>
-      <p:pic>
-        <p:nvPicPr>
-          <p:cNvPr id="11" name="Image 3" descr="preencoded.png">    </p:cNvPr>
-          <p:cNvPicPr>
-            <a:picLocks noChangeAspect="1"/>
-          </p:cNvPicPr>
-          <p:nvPr/>
-        </p:nvPicPr>
-        <p:blipFill>
-          <a:blip r:embed="rId7">
-            <a:extLst>
-              <a:ext uri="{96DAC541-7B7A-43D3-8B79-37D633B846F1}">
-                <asvg:svgBlip xmlns:asvg="http://schemas.microsoft.com/office/drawing/2016/SVG/main" r:embed="rId8"/>
-              </a:ext>
-            </a:extLst>
-          </a:blip>
-          <a:stretch>
-            <a:fillRect/>
-          </a:stretch>
-        </p:blipFill>
-        <p:spPr>
-          <a:xfrm>
-            <a:off x="6190301" y="4157464"/>
-            <a:ext cx="5339919" cy="724098"/>
-          </a:xfrm>
-          <a:prstGeom prst="rect">
-            <a:avLst/>
-          </a:prstGeom>
-        </p:spPr>
-      </p:pic>
-      <p:sp>
-        <p:nvSpPr>
-          <p:cNvPr id="12" name="Text 6"/>
-          <p:cNvSpPr/>
-          <p:nvPr/>
-        </p:nvSpPr>
-        <p:spPr>
-          <a:xfrm>
-            <a:off x="6506305" y="4371876"/>
-            <a:ext cx="4809509" cy="295275"/>
+      <p:sp>
+        <p:nvSpPr>
+          <p:cNvPr id="11" name="Text 9"/>
+          <p:cNvSpPr/>
+          <p:nvPr/>
+        </p:nvSpPr>
+        <p:spPr>
+          <a:xfrm>
+            <a:off x="869531" y="4566345"/>
+            <a:ext cx="4923707" cy="302419"/>
+          </a:xfrm>
+          <a:prstGeom prst="rect">
+            <a:avLst/>
+          </a:prstGeom>
+          <a:noFill/>
+          <a:ln/>
+        </p:spPr>
+        <p:txBody>
+          <a:bodyPr wrap="none" lIns="0" tIns="0" rIns="0" bIns="0" rtlCol="0" anchor="t"/>
+          <a:lstStyle/>
+          <a:p>
+            <a:pPr algn="l" indent="0" marL="0">
+              <a:lnSpc>
+                <a:spcPct val="133000"/>
+              </a:lnSpc>
+              <a:buNone/>
+            </a:pPr>
+            <a:r>
+              <a:rPr lang="en-US" sz="1450" dirty="0">
+                <a:solidFill>
+                  <a:srgbClr val="1C1C1C"/>
+                </a:solidFill>
+                <a:latin typeface="Roboto Condensed" pitchFamily="34" charset="0"/>
+                <a:ea typeface="Roboto Condensed" pitchFamily="34" charset="-122"/>
+                <a:cs typeface="Roboto Condensed" pitchFamily="34" charset="-120"/>
+              </a:rPr>
+              <a:t>Colon and indentation both required</a:t>
+            </a:r>
+            <a:endParaRPr lang="en-US" sz="1450" dirty="0"/>
+          </a:p>
+        </p:txBody>
+      </p:sp>
+      <p:sp>
+        <p:nvSpPr>
+          <p:cNvPr id="12" name="Shape 10"/>
+          <p:cNvSpPr/>
+          <p:nvPr/>
+        </p:nvSpPr>
+        <p:spPr>
+          <a:xfrm>
+            <a:off x="6190301" y="3949601"/>
+            <a:ext cx="5339919" cy="1127224"/>
+          </a:xfrm>
+          <a:prstGeom prst="roundRect">
+            <a:avLst>
+              <a:gd name="adj" fmla="val 7043"/>
+            </a:avLst>
+          </a:prstGeom>
+          <a:solidFill>
+            <a:srgbClr val="D1E5FA"/>
+          </a:solidFill>
+          <a:ln w="19050">
+            <a:solidFill>
+              <a:srgbClr val="B7CBE0"/>
+            </a:solidFill>
+            <a:prstDash val="solid"/>
+          </a:ln>
+        </p:spPr>
+      </p:sp>
+      <p:sp>
+        <p:nvSpPr>
+          <p:cNvPr id="13" name="Text 11"/>
+          <p:cNvSpPr/>
+          <p:nvPr/>
+        </p:nvSpPr>
+        <p:spPr>
+          <a:xfrm>
+            <a:off x="6398358" y="4157662"/>
+            <a:ext cx="4923806" cy="295275"/>
           </a:xfrm>
           <a:prstGeom prst="rect">
             <a:avLst/>
@@ -2360,7 +2394,7 @@
                 <a:ea typeface="Orbitron Bold" pitchFamily="34" charset="-122"/>
                 <a:cs typeface="Orbitron Bold" pitchFamily="34" charset="-120"/>
               </a:rPr>
-              <a:t>Ctrl C stops a runaway program</a:t>
+              <a:t>Ctrl C</a:t>
             </a:r>
             <a:endParaRPr lang="en-US" sz="1850" dirty="0"/>
           </a:p>
@@ -2368,7 +2402,49 @@
       </p:sp>
       <p:sp>
         <p:nvSpPr>
-          <p:cNvPr id="13" name="Text 7"/>
+          <p:cNvPr id="14" name="Text 12"/>
+          <p:cNvSpPr/>
+          <p:nvPr/>
+        </p:nvSpPr>
+        <p:spPr>
+          <a:xfrm>
+            <a:off x="6398358" y="4566345"/>
+            <a:ext cx="4923806" cy="302419"/>
+          </a:xfrm>
+          <a:prstGeom prst="rect">
+            <a:avLst/>
+          </a:prstGeom>
+          <a:noFill/>
+          <a:ln/>
+        </p:spPr>
+        <p:txBody>
+          <a:bodyPr wrap="none" lIns="0" tIns="0" rIns="0" bIns="0" rtlCol="0" anchor="t"/>
+          <a:lstStyle/>
+          <a:p>
+            <a:pPr algn="l" indent="0" marL="0">
+              <a:lnSpc>
+                <a:spcPct val="133000"/>
+              </a:lnSpc>
+              <a:buNone/>
+            </a:pPr>
+            <a:r>
+              <a:rPr lang="en-US" sz="1450" dirty="0">
+                <a:solidFill>
+                  <a:srgbClr val="1C1C1C"/>
+                </a:solidFill>
+                <a:latin typeface="Roboto Condensed" pitchFamily="34" charset="0"/>
+                <a:ea typeface="Roboto Condensed" pitchFamily="34" charset="-122"/>
+                <a:cs typeface="Roboto Condensed" pitchFamily="34" charset="-120"/>
+              </a:rPr>
+              <a:t>Stops a runaway program</a:t>
+            </a:r>
+            <a:endParaRPr lang="en-US" sz="1450" dirty="0"/>
+          </a:p>
+        </p:txBody>
+      </p:sp>
+      <p:sp>
+        <p:nvSpPr>
+          <p:cNvPr id="15" name="Text 13"/>
           <p:cNvSpPr/>
           <p:nvPr/>
         </p:nvSpPr>
@@ -2449,7 +2525,7 @@
         </p:blipFill>
         <p:spPr>
           <a:xfrm>
-            <a:off x="0" y="0"/>
+            <a:off x="7619809" y="0"/>
             <a:ext cx="4571886" cy="6858000"/>
           </a:xfrm>
           <a:prstGeom prst="rect">
@@ -2465,7 +2541,7 @@
         </p:nvSpPr>
         <p:spPr>
           <a:xfrm>
-            <a:off x="5233360" y="1410295"/>
+            <a:off x="661475" y="524470"/>
             <a:ext cx="6296860" cy="1181298"/>
           </a:xfrm>
           <a:prstGeom prst="rect">
@@ -2501,43 +2577,46 @@
           </a:p>
         </p:txBody>
       </p:sp>
-      <p:sp>
-        <p:nvSpPr>
-          <p:cNvPr id="4" name="Shape 1"/>
-          <p:cNvSpPr/>
-          <p:nvPr/>
-        </p:nvSpPr>
-        <p:spPr>
-          <a:xfrm>
-            <a:off x="5233360" y="2875062"/>
-            <a:ext cx="6296860" cy="1549400"/>
-          </a:xfrm>
-          <a:prstGeom prst="roundRect">
-            <a:avLst>
-              <a:gd name="adj" fmla="val 5124"/>
-            </a:avLst>
-          </a:prstGeom>
-          <a:solidFill>
-            <a:srgbClr val="D1E5FA"/>
-          </a:solidFill>
-          <a:ln w="19050">
-            <a:solidFill>
-              <a:srgbClr val="B7CBE0"/>
-            </a:solidFill>
-            <a:prstDash val="solid"/>
-          </a:ln>
-        </p:spPr>
-      </p:sp>
-      <p:sp>
-        <p:nvSpPr>
-          <p:cNvPr id="5" name="Text 2"/>
-          <p:cNvSpPr/>
-          <p:nvPr/>
-        </p:nvSpPr>
-        <p:spPr>
-          <a:xfrm>
-            <a:off x="5441417" y="3083123"/>
-            <a:ext cx="5880747" cy="295275"/>
+      <p:pic>
+        <p:nvPicPr>
+          <p:cNvPr id="4" name="Image 1" descr="preencoded.png">    </p:cNvPr>
+          <p:cNvPicPr>
+            <a:picLocks noChangeAspect="1"/>
+          </p:cNvPicPr>
+          <p:nvPr/>
+        </p:nvPicPr>
+        <p:blipFill>
+          <a:blip r:embed="rId2">
+            <a:extLst>
+              <a:ext uri="{96DAC541-7B7A-43D3-8B79-37D633B846F1}">
+                <asvg:svgBlip xmlns:asvg="http://schemas.microsoft.com/office/drawing/2016/SVG/main" r:embed="rId3"/>
+              </a:ext>
+            </a:extLst>
+          </a:blip>
+          <a:stretch>
+            <a:fillRect/>
+          </a:stretch>
+        </p:blipFill>
+        <p:spPr>
+          <a:xfrm>
+            <a:off x="661475" y="2201863"/>
+            <a:ext cx="2917851" cy="3796209"/>
+          </a:xfrm>
+          <a:prstGeom prst="rect">
+            <a:avLst/>
+          </a:prstGeom>
+        </p:spPr>
+      </p:pic>
+      <p:sp>
+        <p:nvSpPr>
+          <p:cNvPr id="5" name="Text 1"/>
+          <p:cNvSpPr/>
+          <p:nvPr/>
+        </p:nvSpPr>
+        <p:spPr>
+          <a:xfrm>
+            <a:off x="913583" y="3922713"/>
+            <a:ext cx="283461" cy="354409"/>
           </a:xfrm>
           <a:prstGeom prst="rect">
             <a:avLst/>
@@ -2546,17 +2625,17 @@
           <a:ln/>
         </p:spPr>
         <p:txBody>
-          <a:bodyPr wrap="none" lIns="0" tIns="0" rIns="0" bIns="0" rtlCol="0" anchor="t"/>
-          <a:lstStyle/>
-          <a:p>
-            <a:pPr algn="l" indent="0" marL="0">
-              <a:lnSpc>
-                <a:spcPct val="104000"/>
-              </a:lnSpc>
-              <a:buNone/>
-            </a:pPr>
-            <a:r>
-              <a:rPr lang="en-US" sz="1850" b="1" dirty="0">
+          <a:bodyPr wrap="none" lIns="0" tIns="0" rIns="0" bIns="0" rtlCol="0" anchor="ctr"/>
+          <a:lstStyle/>
+          <a:p>
+            <a:pPr algn="ctr" indent="0" marL="0">
+              <a:lnSpc>
+                <a:spcPct val="100000"/>
+              </a:lnSpc>
+              <a:buNone/>
+            </a:pPr>
+            <a:r>
+              <a:rPr lang="en-US" sz="2200" b="1" dirty="0">
                 <a:solidFill>
                   <a:srgbClr val="1C1C1C"/>
                 </a:solidFill>
@@ -2564,6 +2643,50 @@
                 <a:ea typeface="Orbitron Bold" pitchFamily="34" charset="-122"/>
                 <a:cs typeface="Orbitron Bold" pitchFamily="34" charset="-120"/>
               </a:rPr>
+              <a:t>1</a:t>
+            </a:r>
+            <a:endParaRPr lang="en-US" sz="2200" dirty="0"/>
+          </a:p>
+        </p:txBody>
+      </p:sp>
+      <p:sp>
+        <p:nvSpPr>
+          <p:cNvPr id="6" name="Text 2"/>
+          <p:cNvSpPr/>
+          <p:nvPr/>
+        </p:nvSpPr>
+        <p:spPr>
+          <a:xfrm>
+            <a:off x="1631909" y="2416274"/>
+            <a:ext cx="1733011" cy="1181100"/>
+          </a:xfrm>
+          <a:prstGeom prst="rect">
+            <a:avLst/>
+          </a:prstGeom>
+          <a:noFill/>
+          <a:ln/>
+        </p:spPr>
+        <p:txBody>
+          <a:bodyPr wrap="square" lIns="0" tIns="0" rIns="0" bIns="0" rtlCol="0" anchor="t">
+            <a:normAutofit/>
+          </a:bodyPr>
+          <a:lstStyle/>
+          <a:p>
+            <a:pPr algn="l" indent="0" marL="0">
+              <a:lnSpc>
+                <a:spcPct val="104000"/>
+              </a:lnSpc>
+              <a:buNone/>
+            </a:pPr>
+            <a:r>
+              <a:rPr lang="en-US" sz="1850" b="1" dirty="0">
+                <a:solidFill>
+                  <a:srgbClr val="1C1C1C"/>
+                </a:solidFill>
+                <a:latin typeface="Orbitron Bold" pitchFamily="34" charset="0"/>
+                <a:ea typeface="Orbitron Bold" pitchFamily="34" charset="-122"/>
+                <a:cs typeface="Orbitron Bold" pitchFamily="34" charset="-120"/>
+              </a:rPr>
               <a:t>Build 1: Storm Relay game loop skeleton</a:t>
             </a:r>
             <a:endParaRPr lang="en-US" sz="1850" dirty="0"/>
@@ -2572,14 +2695,14 @@
       </p:sp>
       <p:sp>
         <p:nvSpPr>
-          <p:cNvPr id="6" name="Text 3"/>
-          <p:cNvSpPr/>
-          <p:nvPr/>
-        </p:nvSpPr>
-        <p:spPr>
-          <a:xfrm>
-            <a:off x="5441417" y="3491805"/>
-            <a:ext cx="5880747" cy="724595"/>
+          <p:cNvPr id="7" name="Text 3"/>
+          <p:cNvSpPr/>
+          <p:nvPr/>
+        </p:nvSpPr>
+        <p:spPr>
+          <a:xfrm>
+            <a:off x="1631909" y="3786386"/>
+            <a:ext cx="1733011" cy="1997273"/>
           </a:xfrm>
           <a:prstGeom prst="rect">
             <a:avLst/>
@@ -2588,7 +2711,9 @@
           <a:ln/>
         </p:spPr>
         <p:txBody>
-          <a:bodyPr wrap="square" lIns="0" tIns="0" rIns="0" bIns="0" rtlCol="0" anchor="t"/>
+          <a:bodyPr wrap="square" lIns="0" tIns="0" rIns="0" bIns="0" rtlCol="0" anchor="t">
+            <a:normAutofit/>
+          </a:bodyPr>
           <a:lstStyle/>
           <a:p>
             <a:pPr algn="l" indent="0" marL="0">
@@ -2596,7 +2721,7 @@
                 <a:spcPct val="133000"/>
               </a:lnSpc>
               <a:spcAft>
-                <a:spcPts val="850"/>
+                <a:spcPts val="1300"/>
               </a:spcAft>
               <a:buNone/>
             </a:pPr>
@@ -2616,7 +2741,7 @@
                 <a:spcPct val="133000"/>
               </a:lnSpc>
               <a:spcAft>
-                <a:spcPts val="850"/>
+                <a:spcPts val="1300"/>
               </a:spcAft>
               <a:buNone/>
             </a:pPr>
@@ -2658,43 +2783,46 @@
           </a:p>
         </p:txBody>
       </p:sp>
-      <p:sp>
-        <p:nvSpPr>
-          <p:cNvPr id="7" name="Shape 4"/>
-          <p:cNvSpPr/>
-          <p:nvPr/>
-        </p:nvSpPr>
-        <p:spPr>
-          <a:xfrm>
-            <a:off x="5233360" y="4613473"/>
-            <a:ext cx="6296860" cy="711398"/>
-          </a:xfrm>
-          <a:prstGeom prst="roundRect">
-            <a:avLst>
-              <a:gd name="adj" fmla="val 11159"/>
-            </a:avLst>
-          </a:prstGeom>
-          <a:solidFill>
-            <a:srgbClr val="D1E5FA"/>
-          </a:solidFill>
-          <a:ln w="19050">
-            <a:solidFill>
-              <a:srgbClr val="B7CBE0"/>
-            </a:solidFill>
-            <a:prstDash val="solid"/>
-          </a:ln>
-        </p:spPr>
-      </p:sp>
-      <p:sp>
-        <p:nvSpPr>
-          <p:cNvPr id="8" name="Text 5"/>
-          <p:cNvSpPr/>
-          <p:nvPr/>
-        </p:nvSpPr>
-        <p:spPr>
-          <a:xfrm>
-            <a:off x="5441417" y="4821535"/>
-            <a:ext cx="5880747" cy="295275"/>
+      <p:pic>
+        <p:nvPicPr>
+          <p:cNvPr id="8" name="Image 2" descr="preencoded.png">    </p:cNvPr>
+          <p:cNvPicPr>
+            <a:picLocks noChangeAspect="1"/>
+          </p:cNvPicPr>
+          <p:nvPr/>
+        </p:nvPicPr>
+        <p:blipFill>
+          <a:blip r:embed="rId4">
+            <a:extLst>
+              <a:ext uri="{96DAC541-7B7A-43D3-8B79-37D633B846F1}">
+                <asvg:svgBlip xmlns:asvg="http://schemas.microsoft.com/office/drawing/2016/SVG/main" r:embed="rId5"/>
+              </a:ext>
+            </a:extLst>
+          </a:blip>
+          <a:stretch>
+            <a:fillRect/>
+          </a:stretch>
+        </p:blipFill>
+        <p:spPr>
+          <a:xfrm>
+            <a:off x="4046833" y="2201863"/>
+            <a:ext cx="2917851" cy="1609923"/>
+          </a:xfrm>
+          <a:prstGeom prst="rect">
+            <a:avLst/>
+          </a:prstGeom>
+        </p:spPr>
+      </p:pic>
+      <p:sp>
+        <p:nvSpPr>
+          <p:cNvPr id="9" name="Text 4"/>
+          <p:cNvSpPr/>
+          <p:nvPr/>
+        </p:nvSpPr>
+        <p:spPr>
+          <a:xfrm>
+            <a:off x="4298942" y="2829620"/>
+            <a:ext cx="283461" cy="354409"/>
           </a:xfrm>
           <a:prstGeom prst="rect">
             <a:avLst/>
@@ -2703,17 +2831,17 @@
           <a:ln/>
         </p:spPr>
         <p:txBody>
-          <a:bodyPr wrap="none" lIns="0" tIns="0" rIns="0" bIns="0" rtlCol="0" anchor="t"/>
-          <a:lstStyle/>
-          <a:p>
-            <a:pPr algn="l" indent="0" marL="0">
-              <a:lnSpc>
-                <a:spcPct val="104000"/>
-              </a:lnSpc>
-              <a:buNone/>
-            </a:pPr>
-            <a:r>
-              <a:rPr lang="en-US" sz="1850" b="1" dirty="0">
+          <a:bodyPr wrap="none" lIns="0" tIns="0" rIns="0" bIns="0" rtlCol="0" anchor="ctr"/>
+          <a:lstStyle/>
+          <a:p>
+            <a:pPr algn="ctr" indent="0" marL="0">
+              <a:lnSpc>
+                <a:spcPct val="100000"/>
+              </a:lnSpc>
+              <a:buNone/>
+            </a:pPr>
+            <a:r>
+              <a:rPr lang="en-US" sz="2200" b="1" dirty="0">
                 <a:solidFill>
                   <a:srgbClr val="1C1C1C"/>
                 </a:solidFill>
@@ -2721,7 +2849,51 @@
                 <a:ea typeface="Orbitron Bold" pitchFamily="34" charset="-122"/>
                 <a:cs typeface="Orbitron Bold" pitchFamily="34" charset="-120"/>
               </a:rPr>
-              <a:t>Build 2: Gate 2 review of AI decision code</a:t>
+              <a:t>1</a:t>
+            </a:r>
+            <a:endParaRPr lang="en-US" sz="2200" dirty="0"/>
+          </a:p>
+        </p:txBody>
+      </p:sp>
+      <p:sp>
+        <p:nvSpPr>
+          <p:cNvPr id="10" name="Text 5"/>
+          <p:cNvSpPr/>
+          <p:nvPr/>
+        </p:nvSpPr>
+        <p:spPr>
+          <a:xfrm>
+            <a:off x="5017267" y="2416274"/>
+            <a:ext cx="1733011" cy="1181100"/>
+          </a:xfrm>
+          <a:prstGeom prst="rect">
+            <a:avLst/>
+          </a:prstGeom>
+          <a:noFill/>
+          <a:ln/>
+        </p:spPr>
+        <p:txBody>
+          <a:bodyPr wrap="square" lIns="0" tIns="0" rIns="0" bIns="0" rtlCol="0" anchor="t">
+            <a:normAutofit/>
+          </a:bodyPr>
+          <a:lstStyle/>
+          <a:p>
+            <a:pPr algn="l" indent="0" marL="0">
+              <a:lnSpc>
+                <a:spcPct val="104000"/>
+              </a:lnSpc>
+              <a:buNone/>
+            </a:pPr>
+            <a:r>
+              <a:rPr lang="en-US" sz="1850" b="1" dirty="0">
+                <a:solidFill>
+                  <a:srgbClr val="1C1C1C"/>
+                </a:solidFill>
+                <a:latin typeface="Orbitron Bold" pitchFamily="34" charset="0"/>
+                <a:ea typeface="Orbitron Bold" pitchFamily="34" charset="-122"/>
+                <a:cs typeface="Orbitron Bold" pitchFamily="34" charset="-120"/>
+              </a:rPr>
+              <a:t>Build 2: trace a loop before you run it</a:t>
             </a:r>
             <a:endParaRPr lang="en-US" sz="1850" dirty="0"/>
           </a:p>
@@ -2729,13 +2901,13 @@
       </p:sp>
       <p:sp>
         <p:nvSpPr>
-          <p:cNvPr id="9" name="Text 6"/>
-          <p:cNvSpPr/>
-          <p:nvPr/>
-        </p:nvSpPr>
-        <p:spPr>
-          <a:xfrm>
-            <a:off x="4704141" y="6457255"/>
+          <p:cNvPr id="11" name="Text 6"/>
+          <p:cNvSpPr/>
+          <p:nvPr/>
+        </p:nvSpPr>
+        <p:spPr>
+          <a:xfrm>
+            <a:off x="132255" y="6457255"/>
             <a:ext cx="3640642" cy="158750"/>
           </a:xfrm>
           <a:prstGeom prst="rect">
@@ -2826,7 +2998,7 @@
         </p:nvSpPr>
         <p:spPr>
           <a:xfrm>
-            <a:off x="5233360" y="1102519"/>
+            <a:off x="5233360" y="1931194"/>
             <a:ext cx="6296860" cy="1181298"/>
           </a:xfrm>
           <a:prstGeom prst="rect">
@@ -2864,248 +3036,14 @@
       </p:sp>
       <p:sp>
         <p:nvSpPr>
-          <p:cNvPr id="4" name="Shape 1"/>
-          <p:cNvSpPr/>
-          <p:nvPr/>
-        </p:nvSpPr>
-        <p:spPr>
-          <a:xfrm>
-            <a:off x="5233360" y="2567285"/>
-            <a:ext cx="425241" cy="425252"/>
-          </a:xfrm>
-          <a:prstGeom prst="roundRect">
-            <a:avLst>
-              <a:gd name="adj" fmla="val 18669"/>
-            </a:avLst>
-          </a:prstGeom>
-          <a:solidFill>
-            <a:srgbClr val="D1E5FA"/>
-          </a:solidFill>
-          <a:ln w="19050">
-            <a:solidFill>
-              <a:srgbClr val="B7CBE0"/>
-            </a:solidFill>
-            <a:prstDash val="solid"/>
-          </a:ln>
-        </p:spPr>
-      </p:sp>
-      <p:sp>
-        <p:nvSpPr>
-          <p:cNvPr id="5" name="Text 2"/>
-          <p:cNvSpPr/>
-          <p:nvPr/>
-        </p:nvSpPr>
-        <p:spPr>
-          <a:xfrm>
-            <a:off x="5847608" y="2632174"/>
-            <a:ext cx="5682612" cy="295275"/>
-          </a:xfrm>
-          <a:prstGeom prst="rect">
-            <a:avLst/>
-          </a:prstGeom>
-          <a:noFill/>
-          <a:ln/>
-        </p:spPr>
-        <p:txBody>
-          <a:bodyPr wrap="none" lIns="0" tIns="0" rIns="0" bIns="0" rtlCol="0" anchor="t"/>
-          <a:lstStyle/>
-          <a:p>
-            <a:pPr algn="l" indent="0" marL="0">
-              <a:lnSpc>
-                <a:spcPct val="104000"/>
-              </a:lnSpc>
-              <a:buNone/>
-            </a:pPr>
-            <a:r>
-              <a:rPr lang="en-US" sz="1850" b="1" dirty="0">
-                <a:solidFill>
-                  <a:srgbClr val="1C1C1C"/>
-                </a:solidFill>
-                <a:latin typeface="Orbitron Bold" pitchFamily="34" charset="0"/>
-                <a:ea typeface="Orbitron Bold" pitchFamily="34" charset="-122"/>
-                <a:cs typeface="Orbitron Bold" pitchFamily="34" charset="-120"/>
-              </a:rPr>
-              <a:t>Your adventure shows a room</a:t>
-            </a:r>
-            <a:endParaRPr lang="en-US" sz="1850" dirty="0"/>
-          </a:p>
-        </p:txBody>
-      </p:sp>
-      <p:sp>
-        <p:nvSpPr>
-          <p:cNvPr id="6" name="Shape 3"/>
-          <p:cNvSpPr/>
-          <p:nvPr/>
-        </p:nvSpPr>
-        <p:spPr>
-          <a:xfrm>
-            <a:off x="5233360" y="3370560"/>
-            <a:ext cx="425241" cy="425252"/>
-          </a:xfrm>
-          <a:prstGeom prst="roundRect">
-            <a:avLst>
-              <a:gd name="adj" fmla="val 18669"/>
-            </a:avLst>
-          </a:prstGeom>
-          <a:solidFill>
-            <a:srgbClr val="D1E5FA"/>
-          </a:solidFill>
-          <a:ln w="19050">
-            <a:solidFill>
-              <a:srgbClr val="B7CBE0"/>
-            </a:solidFill>
-            <a:prstDash val="solid"/>
-          </a:ln>
-        </p:spPr>
-      </p:sp>
-      <p:sp>
-        <p:nvSpPr>
-          <p:cNvPr id="7" name="Text 4"/>
-          <p:cNvSpPr/>
-          <p:nvPr/>
-        </p:nvSpPr>
-        <p:spPr>
-          <a:xfrm>
-            <a:off x="5847608" y="3435449"/>
-            <a:ext cx="5682612" cy="295275"/>
-          </a:xfrm>
-          <a:prstGeom prst="rect">
-            <a:avLst/>
-          </a:prstGeom>
-          <a:noFill/>
-          <a:ln/>
-        </p:spPr>
-        <p:txBody>
-          <a:bodyPr wrap="none" lIns="0" tIns="0" rIns="0" bIns="0" rtlCol="0" anchor="t"/>
-          <a:lstStyle/>
-          <a:p>
-            <a:pPr algn="l" indent="0" marL="0">
-              <a:lnSpc>
-                <a:spcPct val="104000"/>
-              </a:lnSpc>
-              <a:buNone/>
-            </a:pPr>
-            <a:r>
-              <a:rPr lang="en-US" sz="1850" b="1" dirty="0">
-                <a:solidFill>
-                  <a:srgbClr val="1C1C1C"/>
-                </a:solidFill>
-                <a:latin typeface="Orbitron Bold" pitchFamily="34" charset="0"/>
-                <a:ea typeface="Orbitron Bold" pitchFamily="34" charset="-122"/>
-                <a:cs typeface="Orbitron Bold" pitchFamily="34" charset="-120"/>
-              </a:rPr>
-              <a:t>You type north</a:t>
-            </a:r>
-            <a:endParaRPr lang="en-US" sz="1850" dirty="0"/>
-          </a:p>
-        </p:txBody>
-      </p:sp>
-      <p:sp>
-        <p:nvSpPr>
-          <p:cNvPr id="8" name="Shape 5"/>
-          <p:cNvSpPr/>
-          <p:nvPr/>
-        </p:nvSpPr>
-        <p:spPr>
-          <a:xfrm>
-            <a:off x="5233360" y="4173835"/>
-            <a:ext cx="425241" cy="425252"/>
-          </a:xfrm>
-          <a:prstGeom prst="roundRect">
-            <a:avLst>
-              <a:gd name="adj" fmla="val 18669"/>
-            </a:avLst>
-          </a:prstGeom>
-          <a:solidFill>
-            <a:srgbClr val="D1E5FA"/>
-          </a:solidFill>
-          <a:ln w="19050">
-            <a:solidFill>
-              <a:srgbClr val="B7CBE0"/>
-            </a:solidFill>
-            <a:prstDash val="solid"/>
-          </a:ln>
-        </p:spPr>
-      </p:sp>
-      <p:sp>
-        <p:nvSpPr>
-          <p:cNvPr id="9" name="Text 6"/>
-          <p:cNvSpPr/>
-          <p:nvPr/>
-        </p:nvSpPr>
-        <p:spPr>
-          <a:xfrm>
-            <a:off x="5847608" y="4238724"/>
-            <a:ext cx="5682612" cy="295275"/>
-          </a:xfrm>
-          <a:prstGeom prst="rect">
-            <a:avLst/>
-          </a:prstGeom>
-          <a:noFill/>
-          <a:ln/>
-        </p:spPr>
-        <p:txBody>
-          <a:bodyPr wrap="none" lIns="0" tIns="0" rIns="0" bIns="0" rtlCol="0" anchor="t"/>
-          <a:lstStyle/>
-          <a:p>
-            <a:pPr algn="l" indent="0" marL="0">
-              <a:lnSpc>
-                <a:spcPct val="104000"/>
-              </a:lnSpc>
-              <a:buNone/>
-            </a:pPr>
-            <a:r>
-              <a:rPr lang="en-US" sz="1850" b="1" dirty="0">
-                <a:solidFill>
-                  <a:srgbClr val="1C1C1C"/>
-                </a:solidFill>
-                <a:latin typeface="Orbitron Bold" pitchFamily="34" charset="0"/>
-                <a:ea typeface="Orbitron Bold" pitchFamily="34" charset="-122"/>
-                <a:cs typeface="Orbitron Bold" pitchFamily="34" charset="-120"/>
-              </a:rPr>
-              <a:t>It prints the next room</a:t>
-            </a:r>
-            <a:endParaRPr lang="en-US" sz="1850" dirty="0"/>
-          </a:p>
-        </p:txBody>
-      </p:sp>
-      <p:sp>
-        <p:nvSpPr>
-          <p:cNvPr id="10" name="Shape 7"/>
-          <p:cNvSpPr/>
-          <p:nvPr/>
-        </p:nvSpPr>
-        <p:spPr>
-          <a:xfrm>
-            <a:off x="5233360" y="4977110"/>
-            <a:ext cx="425241" cy="425252"/>
-          </a:xfrm>
-          <a:prstGeom prst="roundRect">
-            <a:avLst>
-              <a:gd name="adj" fmla="val 18669"/>
-            </a:avLst>
-          </a:prstGeom>
-          <a:solidFill>
-            <a:srgbClr val="D1E5FA"/>
-          </a:solidFill>
-          <a:ln w="19050">
-            <a:solidFill>
-              <a:srgbClr val="B7CBE0"/>
-            </a:solidFill>
-            <a:prstDash val="solid"/>
-          </a:ln>
-        </p:spPr>
-      </p:sp>
-      <p:sp>
-        <p:nvSpPr>
-          <p:cNvPr id="11" name="Text 8"/>
-          <p:cNvSpPr/>
-          <p:nvPr/>
-        </p:nvSpPr>
-        <p:spPr>
-          <a:xfrm>
-            <a:off x="5847608" y="5041999"/>
-            <a:ext cx="5682612" cy="590550"/>
+          <p:cNvPr id="4" name="Text 1"/>
+          <p:cNvSpPr/>
+          <p:nvPr/>
+        </p:nvSpPr>
+        <p:spPr>
+          <a:xfrm>
+            <a:off x="5233360" y="3395960"/>
+            <a:ext cx="6296860" cy="1407914"/>
           </a:xfrm>
           <a:prstGeom prst="rect">
             <a:avLst/>
@@ -3119,30 +3057,94 @@
           </a:bodyPr>
           <a:lstStyle/>
           <a:p>
-            <a:pPr algn="l" indent="0" marL="0">
-              <a:lnSpc>
-                <a:spcPct val="104000"/>
-              </a:lnSpc>
-              <a:buNone/>
-            </a:pPr>
-            <a:r>
-              <a:rPr lang="en-US" sz="1850" b="1" dirty="0">
+            <a:pPr algn="l" marL="294640" indent="-294640">
+              <a:lnSpc>
+                <a:spcPct val="133000"/>
+              </a:lnSpc>
+              <a:buSzPct val="100000"/>
+              <a:buChar char="•"/>
+            </a:pPr>
+            <a:r>
+              <a:rPr lang="en-US" sz="1450" dirty="0">
                 <a:solidFill>
                   <a:srgbClr val="1C1C1C"/>
                 </a:solidFill>
-                <a:latin typeface="Orbitron Bold" pitchFamily="34" charset="0"/>
-                <a:ea typeface="Orbitron Bold" pitchFamily="34" charset="-122"/>
-                <a:cs typeface="Orbitron Bold" pitchFamily="34" charset="-120"/>
+                <a:latin typeface="Roboto Condensed" pitchFamily="34" charset="0"/>
+                <a:ea typeface="Roboto Condensed" pitchFamily="34" charset="-122"/>
+                <a:cs typeface="Roboto Condensed" pitchFamily="34" charset="-120"/>
+              </a:rPr>
+              <a:t>Your adventure shows a room</a:t>
+            </a:r>
+            <a:endParaRPr lang="en-US" sz="1450" dirty="0"/>
+          </a:p>
+          <a:p>
+            <a:pPr algn="l" marL="294640" indent="-294640">
+              <a:lnSpc>
+                <a:spcPct val="133000"/>
+              </a:lnSpc>
+              <a:buSzPct val="100000"/>
+              <a:buChar char="•"/>
+            </a:pPr>
+            <a:r>
+              <a:rPr lang="en-US" sz="1450" dirty="0">
+                <a:solidFill>
+                  <a:srgbClr val="1C1C1C"/>
+                </a:solidFill>
+                <a:latin typeface="Roboto Condensed" pitchFamily="34" charset="0"/>
+                <a:ea typeface="Roboto Condensed" pitchFamily="34" charset="-122"/>
+                <a:cs typeface="Roboto Condensed" pitchFamily="34" charset="-120"/>
+              </a:rPr>
+              <a:t>You type north</a:t>
+            </a:r>
+            <a:endParaRPr lang="en-US" sz="1450" dirty="0"/>
+          </a:p>
+          <a:p>
+            <a:pPr algn="l" marL="294640" indent="-294640">
+              <a:lnSpc>
+                <a:spcPct val="133000"/>
+              </a:lnSpc>
+              <a:buSzPct val="100000"/>
+              <a:buChar char="•"/>
+            </a:pPr>
+            <a:r>
+              <a:rPr lang="en-US" sz="1450" dirty="0">
+                <a:solidFill>
+                  <a:srgbClr val="1C1C1C"/>
+                </a:solidFill>
+                <a:latin typeface="Roboto Condensed" pitchFamily="34" charset="0"/>
+                <a:ea typeface="Roboto Condensed" pitchFamily="34" charset="-122"/>
+                <a:cs typeface="Roboto Condensed" pitchFamily="34" charset="-120"/>
+              </a:rPr>
+              <a:t>It prints the next room</a:t>
+            </a:r>
+            <a:endParaRPr lang="en-US" sz="1450" dirty="0"/>
+          </a:p>
+          <a:p>
+            <a:pPr algn="l" marL="294640" indent="-294640">
+              <a:lnSpc>
+                <a:spcPct val="133000"/>
+              </a:lnSpc>
+              <a:buSzPct val="100000"/>
+              <a:buChar char="•"/>
+            </a:pPr>
+            <a:r>
+              <a:rPr lang="en-US" sz="1450" dirty="0">
+                <a:solidFill>
+                  <a:srgbClr val="1C1C1C"/>
+                </a:solidFill>
+                <a:latin typeface="Roboto Condensed" pitchFamily="34" charset="0"/>
+                <a:ea typeface="Roboto Condensed" pitchFamily="34" charset="-122"/>
+                <a:cs typeface="Roboto Condensed" pitchFamily="34" charset="-120"/>
               </a:rPr>
               <a:t>Then the program ends. Game over, after one move</a:t>
             </a:r>
-            <a:endParaRPr lang="en-US" sz="1850" dirty="0"/>
-          </a:p>
-        </p:txBody>
-      </p:sp>
-      <p:sp>
-        <p:nvSpPr>
-          <p:cNvPr id="12" name="Text 9"/>
+            <a:endParaRPr lang="en-US" sz="1450" dirty="0"/>
+          </a:p>
+        </p:txBody>
+      </p:sp>
+      <p:sp>
+        <p:nvSpPr>
+          <p:cNvPr id="5" name="Text 2"/>
           <p:cNvSpPr/>
           <p:nvPr/>
         </p:nvSpPr>
@@ -3215,7 +3217,7 @@
         </p:nvSpPr>
         <p:spPr>
           <a:xfrm>
-            <a:off x="661475" y="846534"/>
+            <a:off x="661475" y="1064022"/>
             <a:ext cx="10868745" cy="590649"/>
           </a:xfrm>
           <a:prstGeom prst="rect">
@@ -3249,40 +3251,43 @@
           </a:p>
         </p:txBody>
       </p:sp>
-      <p:pic>
-        <p:nvPicPr>
-          <p:cNvPr id="3" name="Image 0" descr="preencoded.png">    </p:cNvPr>
-          <p:cNvPicPr>
-            <a:picLocks noChangeAspect="1"/>
-          </p:cNvPicPr>
-          <p:nvPr/>
-        </p:nvPicPr>
-        <p:blipFill>
-          <a:blip r:embed="rId1"/>
-          <a:stretch>
-            <a:fillRect/>
-          </a:stretch>
-        </p:blipFill>
-        <p:spPr>
-          <a:xfrm>
-            <a:off x="900784" y="1815207"/>
-            <a:ext cx="10390027" cy="4073327"/>
-          </a:xfrm>
-          <a:prstGeom prst="rect">
-            <a:avLst/>
-          </a:prstGeom>
-        </p:spPr>
-      </p:pic>
-      <p:sp>
-        <p:nvSpPr>
-          <p:cNvPr id="4" name="Text 1"/>
-          <p:cNvSpPr/>
-          <p:nvPr/>
-        </p:nvSpPr>
-        <p:spPr>
-          <a:xfrm>
-            <a:off x="1149442" y="2014971"/>
-            <a:ext cx="1902017" cy="611378"/>
+      <p:sp>
+        <p:nvSpPr>
+          <p:cNvPr id="3" name="Shape 1"/>
+          <p:cNvSpPr/>
+          <p:nvPr/>
+        </p:nvSpPr>
+        <p:spPr>
+          <a:xfrm>
+            <a:off x="661475" y="2032695"/>
+            <a:ext cx="425241" cy="425252"/>
+          </a:xfrm>
+          <a:prstGeom prst="roundRect">
+            <a:avLst>
+              <a:gd name="adj" fmla="val 18669"/>
+            </a:avLst>
+          </a:prstGeom>
+          <a:solidFill>
+            <a:srgbClr val="D1E5FA"/>
+          </a:solidFill>
+          <a:ln w="19050">
+            <a:solidFill>
+              <a:srgbClr val="B7CBE0"/>
+            </a:solidFill>
+            <a:prstDash val="solid"/>
+          </a:ln>
+        </p:spPr>
+      </p:sp>
+      <p:sp>
+        <p:nvSpPr>
+          <p:cNvPr id="4" name="Text 2"/>
+          <p:cNvSpPr/>
+          <p:nvPr/>
+        </p:nvSpPr>
+        <p:spPr>
+          <a:xfrm>
+            <a:off x="732365" y="2068116"/>
+            <a:ext cx="283461" cy="354409"/>
           </a:xfrm>
           <a:prstGeom prst="rect">
             <a:avLst/>
@@ -3291,42 +3296,40 @@
           <a:ln/>
         </p:spPr>
         <p:txBody>
-          <a:bodyPr wrap="square" lIns="0" tIns="0" rIns="0" bIns="0" rtlCol="0" anchor="t">
-            <a:normAutofit/>
-          </a:bodyPr>
-          <a:lstStyle/>
-          <a:p>
-            <a:pPr algn="r" indent="0" marL="0">
-              <a:lnSpc>
-                <a:spcPct val="104000"/>
-              </a:lnSpc>
-              <a:buNone/>
-            </a:pPr>
-            <a:r>
-              <a:rPr lang="en-US" sz="1900" b="1" dirty="0">
-                <a:solidFill>
-                  <a:srgbClr val="111111"/>
+          <a:bodyPr wrap="none" lIns="0" tIns="0" rIns="0" bIns="0" rtlCol="0" anchor="ctr"/>
+          <a:lstStyle/>
+          <a:p>
+            <a:pPr algn="ctr" indent="0" marL="0">
+              <a:lnSpc>
+                <a:spcPct val="100000"/>
+              </a:lnSpc>
+              <a:buNone/>
+            </a:pPr>
+            <a:r>
+              <a:rPr lang="en-US" sz="2200" b="1" dirty="0">
+                <a:solidFill>
+                  <a:srgbClr val="1C1C1C"/>
                 </a:solidFill>
                 <a:latin typeface="Orbitron Bold" pitchFamily="34" charset="0"/>
                 <a:ea typeface="Orbitron Bold" pitchFamily="34" charset="-122"/>
                 <a:cs typeface="Orbitron Bold" pitchFamily="34" charset="-120"/>
               </a:rPr>
-              <a:t>Check Condition</a:t>
-            </a:r>
-            <a:endParaRPr lang="en-US" sz="1900" dirty="0"/>
-          </a:p>
-        </p:txBody>
-      </p:sp>
-      <p:sp>
-        <p:nvSpPr>
-          <p:cNvPr id="5" name="Text 2"/>
-          <p:cNvSpPr/>
-          <p:nvPr/>
-        </p:nvSpPr>
-        <p:spPr>
-          <a:xfrm>
-            <a:off x="9139949" y="2014971"/>
-            <a:ext cx="1902016" cy="611378"/>
+              <a:t>1</a:t>
+            </a:r>
+            <a:endParaRPr lang="en-US" sz="2200" dirty="0"/>
+          </a:p>
+        </p:txBody>
+      </p:sp>
+      <p:sp>
+        <p:nvSpPr>
+          <p:cNvPr id="5" name="Text 3"/>
+          <p:cNvSpPr/>
+          <p:nvPr/>
+        </p:nvSpPr>
+        <p:spPr>
+          <a:xfrm>
+            <a:off x="1275723" y="2097584"/>
+            <a:ext cx="10254497" cy="295275"/>
           </a:xfrm>
           <a:prstGeom prst="rect">
             <a:avLst/>
@@ -3335,9 +3338,7 @@
           <a:ln/>
         </p:spPr>
         <p:txBody>
-          <a:bodyPr wrap="square" lIns="0" tIns="0" rIns="0" bIns="0" rtlCol="0" anchor="t">
-            <a:normAutofit/>
-          </a:bodyPr>
+          <a:bodyPr wrap="none" lIns="0" tIns="0" rIns="0" bIns="0" rtlCol="0" anchor="t"/>
           <a:lstStyle/>
           <a:p>
             <a:pPr algn="l" indent="0" marL="0">
@@ -3347,30 +3348,57 @@
               <a:buNone/>
             </a:pPr>
             <a:r>
-              <a:rPr lang="en-US" sz="1900" b="1" dirty="0">
-                <a:solidFill>
-                  <a:srgbClr val="111111"/>
+              <a:rPr lang="en-US" sz="1850" b="1" dirty="0">
+                <a:solidFill>
+                  <a:srgbClr val="1C1C1C"/>
                 </a:solidFill>
                 <a:latin typeface="Orbitron Bold" pitchFamily="34" charset="0"/>
                 <a:ea typeface="Orbitron Bold" pitchFamily="34" charset="-122"/>
                 <a:cs typeface="Orbitron Bold" pitchFamily="34" charset="-120"/>
               </a:rPr>
-              <a:t>False: Exit Loop</a:t>
-            </a:r>
-            <a:endParaRPr lang="en-US" sz="1900" dirty="0"/>
-          </a:p>
-        </p:txBody>
-      </p:sp>
-      <p:sp>
-        <p:nvSpPr>
-          <p:cNvPr id="6" name="Text 3"/>
-          <p:cNvSpPr/>
-          <p:nvPr/>
-        </p:nvSpPr>
-        <p:spPr>
-          <a:xfrm>
-            <a:off x="9139949" y="5077294"/>
-            <a:ext cx="1902016" cy="611378"/>
+              <a:t>Check the condition at the top</a:t>
+            </a:r>
+            <a:endParaRPr lang="en-US" sz="1850" dirty="0"/>
+          </a:p>
+        </p:txBody>
+      </p:sp>
+      <p:sp>
+        <p:nvSpPr>
+          <p:cNvPr id="6" name="Shape 4"/>
+          <p:cNvSpPr/>
+          <p:nvPr/>
+        </p:nvSpPr>
+        <p:spPr>
+          <a:xfrm>
+            <a:off x="661475" y="2835970"/>
+            <a:ext cx="425241" cy="425252"/>
+          </a:xfrm>
+          <a:prstGeom prst="roundRect">
+            <a:avLst>
+              <a:gd name="adj" fmla="val 18669"/>
+            </a:avLst>
+          </a:prstGeom>
+          <a:solidFill>
+            <a:srgbClr val="D1E5FA"/>
+          </a:solidFill>
+          <a:ln w="19050">
+            <a:solidFill>
+              <a:srgbClr val="B7CBE0"/>
+            </a:solidFill>
+            <a:prstDash val="solid"/>
+          </a:ln>
+        </p:spPr>
+      </p:sp>
+      <p:sp>
+        <p:nvSpPr>
+          <p:cNvPr id="7" name="Text 5"/>
+          <p:cNvSpPr/>
+          <p:nvPr/>
+        </p:nvSpPr>
+        <p:spPr>
+          <a:xfrm>
+            <a:off x="732365" y="2871391"/>
+            <a:ext cx="283461" cy="354409"/>
           </a:xfrm>
           <a:prstGeom prst="rect">
             <a:avLst/>
@@ -3379,42 +3407,40 @@
           <a:ln/>
         </p:spPr>
         <p:txBody>
-          <a:bodyPr wrap="square" lIns="0" tIns="0" rIns="0" bIns="0" rtlCol="0" anchor="t">
-            <a:normAutofit/>
-          </a:bodyPr>
-          <a:lstStyle/>
-          <a:p>
-            <a:pPr algn="l" indent="0" marL="0">
-              <a:lnSpc>
-                <a:spcPct val="104000"/>
-              </a:lnSpc>
-              <a:buNone/>
-            </a:pPr>
-            <a:r>
-              <a:rPr lang="en-US" sz="1900" b="1" dirty="0">
-                <a:solidFill>
-                  <a:srgbClr val="111111"/>
+          <a:bodyPr wrap="none" lIns="0" tIns="0" rIns="0" bIns="0" rtlCol="0" anchor="ctr"/>
+          <a:lstStyle/>
+          <a:p>
+            <a:pPr algn="ctr" indent="0" marL="0">
+              <a:lnSpc>
+                <a:spcPct val="100000"/>
+              </a:lnSpc>
+              <a:buNone/>
+            </a:pPr>
+            <a:r>
+              <a:rPr lang="en-US" sz="2200" b="1" dirty="0">
+                <a:solidFill>
+                  <a:srgbClr val="1C1C1C"/>
                 </a:solidFill>
                 <a:latin typeface="Orbitron Bold" pitchFamily="34" charset="0"/>
                 <a:ea typeface="Orbitron Bold" pitchFamily="34" charset="-122"/>
                 <a:cs typeface="Orbitron Bold" pitchFamily="34" charset="-120"/>
               </a:rPr>
-              <a:t>True: Run Block</a:t>
-            </a:r>
-            <a:endParaRPr lang="en-US" sz="1900" dirty="0"/>
-          </a:p>
-        </p:txBody>
-      </p:sp>
-      <p:sp>
-        <p:nvSpPr>
-          <p:cNvPr id="7" name="Text 4"/>
-          <p:cNvSpPr/>
-          <p:nvPr/>
-        </p:nvSpPr>
-        <p:spPr>
-          <a:xfrm>
-            <a:off x="1149442" y="5382983"/>
-            <a:ext cx="1902017" cy="305689"/>
+              <a:t>2</a:t>
+            </a:r>
+            <a:endParaRPr lang="en-US" sz="2200" dirty="0"/>
+          </a:p>
+        </p:txBody>
+      </p:sp>
+      <p:sp>
+        <p:nvSpPr>
+          <p:cNvPr id="8" name="Text 6"/>
+          <p:cNvSpPr/>
+          <p:nvPr/>
+        </p:nvSpPr>
+        <p:spPr>
+          <a:xfrm>
+            <a:off x="1275723" y="2900859"/>
+            <a:ext cx="10254497" cy="295275"/>
           </a:xfrm>
           <a:prstGeom prst="rect">
             <a:avLst/>
@@ -3426,30 +3452,363 @@
           <a:bodyPr wrap="none" lIns="0" tIns="0" rIns="0" bIns="0" rtlCol="0" anchor="t"/>
           <a:lstStyle/>
           <a:p>
-            <a:pPr algn="r" indent="0" marL="0">
+            <a:pPr algn="l" indent="0" marL="0">
               <a:lnSpc>
                 <a:spcPct val="104000"/>
               </a:lnSpc>
               <a:buNone/>
             </a:pPr>
             <a:r>
-              <a:rPr lang="en-US" sz="1900" b="1" dirty="0">
-                <a:solidFill>
-                  <a:srgbClr val="111111"/>
+              <a:rPr lang="en-US" sz="1850" b="1" dirty="0">
+                <a:solidFill>
+                  <a:srgbClr val="1C1C1C"/>
                 </a:solidFill>
                 <a:latin typeface="Orbitron Bold" pitchFamily="34" charset="0"/>
                 <a:ea typeface="Orbitron Bold" pitchFamily="34" charset="-122"/>
                 <a:cs typeface="Orbitron Bold" pitchFamily="34" charset="-120"/>
               </a:rPr>
-              <a:t>Modify State</a:t>
-            </a:r>
-            <a:endParaRPr lang="en-US" sz="1900" dirty="0"/>
-          </a:p>
-        </p:txBody>
-      </p:sp>
-      <p:sp>
-        <p:nvSpPr>
-          <p:cNvPr id="8" name="Text 5"/>
+              <a:t>False: skip the block, the loop is over</a:t>
+            </a:r>
+            <a:endParaRPr lang="en-US" sz="1850" dirty="0"/>
+          </a:p>
+        </p:txBody>
+      </p:sp>
+      <p:sp>
+        <p:nvSpPr>
+          <p:cNvPr id="9" name="Shape 7"/>
+          <p:cNvSpPr/>
+          <p:nvPr/>
+        </p:nvSpPr>
+        <p:spPr>
+          <a:xfrm>
+            <a:off x="661475" y="3639245"/>
+            <a:ext cx="425241" cy="425252"/>
+          </a:xfrm>
+          <a:prstGeom prst="roundRect">
+            <a:avLst>
+              <a:gd name="adj" fmla="val 18669"/>
+            </a:avLst>
+          </a:prstGeom>
+          <a:solidFill>
+            <a:srgbClr val="D1E5FA"/>
+          </a:solidFill>
+          <a:ln w="19050">
+            <a:solidFill>
+              <a:srgbClr val="B7CBE0"/>
+            </a:solidFill>
+            <a:prstDash val="solid"/>
+          </a:ln>
+        </p:spPr>
+      </p:sp>
+      <p:sp>
+        <p:nvSpPr>
+          <p:cNvPr id="10" name="Text 8"/>
+          <p:cNvSpPr/>
+          <p:nvPr/>
+        </p:nvSpPr>
+        <p:spPr>
+          <a:xfrm>
+            <a:off x="732365" y="3674666"/>
+            <a:ext cx="283461" cy="354409"/>
+          </a:xfrm>
+          <a:prstGeom prst="rect">
+            <a:avLst/>
+          </a:prstGeom>
+          <a:noFill/>
+          <a:ln/>
+        </p:spPr>
+        <p:txBody>
+          <a:bodyPr wrap="none" lIns="0" tIns="0" rIns="0" bIns="0" rtlCol="0" anchor="ctr"/>
+          <a:lstStyle/>
+          <a:p>
+            <a:pPr algn="ctr" indent="0" marL="0">
+              <a:lnSpc>
+                <a:spcPct val="100000"/>
+              </a:lnSpc>
+              <a:buNone/>
+            </a:pPr>
+            <a:r>
+              <a:rPr lang="en-US" sz="2200" b="1" dirty="0">
+                <a:solidFill>
+                  <a:srgbClr val="1C1C1C"/>
+                </a:solidFill>
+                <a:latin typeface="Orbitron Bold" pitchFamily="34" charset="0"/>
+                <a:ea typeface="Orbitron Bold" pitchFamily="34" charset="-122"/>
+                <a:cs typeface="Orbitron Bold" pitchFamily="34" charset="-120"/>
+              </a:rPr>
+              <a:t>3</a:t>
+            </a:r>
+            <a:endParaRPr lang="en-US" sz="2200" dirty="0"/>
+          </a:p>
+        </p:txBody>
+      </p:sp>
+      <p:sp>
+        <p:nvSpPr>
+          <p:cNvPr id="11" name="Text 9"/>
+          <p:cNvSpPr/>
+          <p:nvPr/>
+        </p:nvSpPr>
+        <p:spPr>
+          <a:xfrm>
+            <a:off x="1275723" y="3704134"/>
+            <a:ext cx="10254497" cy="295275"/>
+          </a:xfrm>
+          <a:prstGeom prst="rect">
+            <a:avLst/>
+          </a:prstGeom>
+          <a:noFill/>
+          <a:ln/>
+        </p:spPr>
+        <p:txBody>
+          <a:bodyPr wrap="none" lIns="0" tIns="0" rIns="0" bIns="0" rtlCol="0" anchor="t"/>
+          <a:lstStyle/>
+          <a:p>
+            <a:pPr algn="l" indent="0" marL="0">
+              <a:lnSpc>
+                <a:spcPct val="104000"/>
+              </a:lnSpc>
+              <a:buNone/>
+            </a:pPr>
+            <a:r>
+              <a:rPr lang="en-US" sz="1850" b="1" dirty="0">
+                <a:solidFill>
+                  <a:srgbClr val="1C1C1C"/>
+                </a:solidFill>
+                <a:latin typeface="Orbitron Bold" pitchFamily="34" charset="0"/>
+                <a:ea typeface="Orbitron Bold" pitchFamily="34" charset="-122"/>
+                <a:cs typeface="Orbitron Bold" pitchFamily="34" charset="-120"/>
+              </a:rPr>
+              <a:t>True: run the whole block</a:t>
+            </a:r>
+            <a:endParaRPr lang="en-US" sz="1850" dirty="0"/>
+          </a:p>
+        </p:txBody>
+      </p:sp>
+      <p:sp>
+        <p:nvSpPr>
+          <p:cNvPr id="12" name="Shape 10"/>
+          <p:cNvSpPr/>
+          <p:nvPr/>
+        </p:nvSpPr>
+        <p:spPr>
+          <a:xfrm>
+            <a:off x="661475" y="4442520"/>
+            <a:ext cx="425241" cy="425252"/>
+          </a:xfrm>
+          <a:prstGeom prst="roundRect">
+            <a:avLst>
+              <a:gd name="adj" fmla="val 18669"/>
+            </a:avLst>
+          </a:prstGeom>
+          <a:solidFill>
+            <a:srgbClr val="D1E5FA"/>
+          </a:solidFill>
+          <a:ln w="19050">
+            <a:solidFill>
+              <a:srgbClr val="B7CBE0"/>
+            </a:solidFill>
+            <a:prstDash val="solid"/>
+          </a:ln>
+        </p:spPr>
+      </p:sp>
+      <p:sp>
+        <p:nvSpPr>
+          <p:cNvPr id="13" name="Text 11"/>
+          <p:cNvSpPr/>
+          <p:nvPr/>
+        </p:nvSpPr>
+        <p:spPr>
+          <a:xfrm>
+            <a:off x="732365" y="4477941"/>
+            <a:ext cx="283461" cy="354409"/>
+          </a:xfrm>
+          <a:prstGeom prst="rect">
+            <a:avLst/>
+          </a:prstGeom>
+          <a:noFill/>
+          <a:ln/>
+        </p:spPr>
+        <p:txBody>
+          <a:bodyPr wrap="none" lIns="0" tIns="0" rIns="0" bIns="0" rtlCol="0" anchor="ctr"/>
+          <a:lstStyle/>
+          <a:p>
+            <a:pPr algn="ctr" indent="0" marL="0">
+              <a:lnSpc>
+                <a:spcPct val="100000"/>
+              </a:lnSpc>
+              <a:buNone/>
+            </a:pPr>
+            <a:r>
+              <a:rPr lang="en-US" sz="2200" b="1" dirty="0">
+                <a:solidFill>
+                  <a:srgbClr val="1C1C1C"/>
+                </a:solidFill>
+                <a:latin typeface="Orbitron Bold" pitchFamily="34" charset="0"/>
+                <a:ea typeface="Orbitron Bold" pitchFamily="34" charset="-122"/>
+                <a:cs typeface="Orbitron Bold" pitchFamily="34" charset="-120"/>
+              </a:rPr>
+              <a:t>4</a:t>
+            </a:r>
+            <a:endParaRPr lang="en-US" sz="2200" dirty="0"/>
+          </a:p>
+        </p:txBody>
+      </p:sp>
+      <p:sp>
+        <p:nvSpPr>
+          <p:cNvPr id="14" name="Text 12"/>
+          <p:cNvSpPr/>
+          <p:nvPr/>
+        </p:nvSpPr>
+        <p:spPr>
+          <a:xfrm>
+            <a:off x="1275723" y="4507409"/>
+            <a:ext cx="10254497" cy="295275"/>
+          </a:xfrm>
+          <a:prstGeom prst="rect">
+            <a:avLst/>
+          </a:prstGeom>
+          <a:noFill/>
+          <a:ln/>
+        </p:spPr>
+        <p:txBody>
+          <a:bodyPr wrap="none" lIns="0" tIns="0" rIns="0" bIns="0" rtlCol="0" anchor="t"/>
+          <a:lstStyle/>
+          <a:p>
+            <a:pPr algn="l" indent="0" marL="0">
+              <a:lnSpc>
+                <a:spcPct val="104000"/>
+              </a:lnSpc>
+              <a:buNone/>
+            </a:pPr>
+            <a:r>
+              <a:rPr lang="en-US" sz="1850" b="1" dirty="0">
+                <a:solidFill>
+                  <a:srgbClr val="1C1C1C"/>
+                </a:solidFill>
+                <a:latin typeface="Orbitron Bold" pitchFamily="34" charset="0"/>
+                <a:ea typeface="Orbitron Bold" pitchFamily="34" charset="-122"/>
+                <a:cs typeface="Orbitron Bold" pitchFamily="34" charset="-120"/>
+              </a:rPr>
+              <a:t>Go back to the top and check again</a:t>
+            </a:r>
+            <a:endParaRPr lang="en-US" sz="1850" dirty="0"/>
+          </a:p>
+        </p:txBody>
+      </p:sp>
+      <p:sp>
+        <p:nvSpPr>
+          <p:cNvPr id="15" name="Shape 13"/>
+          <p:cNvSpPr/>
+          <p:nvPr/>
+        </p:nvSpPr>
+        <p:spPr>
+          <a:xfrm>
+            <a:off x="661475" y="5245795"/>
+            <a:ext cx="425241" cy="425252"/>
+          </a:xfrm>
+          <a:prstGeom prst="roundRect">
+            <a:avLst>
+              <a:gd name="adj" fmla="val 18669"/>
+            </a:avLst>
+          </a:prstGeom>
+          <a:solidFill>
+            <a:srgbClr val="D1E5FA"/>
+          </a:solidFill>
+          <a:ln w="19050">
+            <a:solidFill>
+              <a:srgbClr val="B7CBE0"/>
+            </a:solidFill>
+            <a:prstDash val="solid"/>
+          </a:ln>
+        </p:spPr>
+      </p:sp>
+      <p:sp>
+        <p:nvSpPr>
+          <p:cNvPr id="16" name="Text 14"/>
+          <p:cNvSpPr/>
+          <p:nvPr/>
+        </p:nvSpPr>
+        <p:spPr>
+          <a:xfrm>
+            <a:off x="732365" y="5281216"/>
+            <a:ext cx="283461" cy="354409"/>
+          </a:xfrm>
+          <a:prstGeom prst="rect">
+            <a:avLst/>
+          </a:prstGeom>
+          <a:noFill/>
+          <a:ln/>
+        </p:spPr>
+        <p:txBody>
+          <a:bodyPr wrap="none" lIns="0" tIns="0" rIns="0" bIns="0" rtlCol="0" anchor="ctr"/>
+          <a:lstStyle/>
+          <a:p>
+            <a:pPr algn="ctr" indent="0" marL="0">
+              <a:lnSpc>
+                <a:spcPct val="100000"/>
+              </a:lnSpc>
+              <a:buNone/>
+            </a:pPr>
+            <a:r>
+              <a:rPr lang="en-US" sz="2200" b="1" dirty="0">
+                <a:solidFill>
+                  <a:srgbClr val="1C1C1C"/>
+                </a:solidFill>
+                <a:latin typeface="Orbitron Bold" pitchFamily="34" charset="0"/>
+                <a:ea typeface="Orbitron Bold" pitchFamily="34" charset="-122"/>
+                <a:cs typeface="Orbitron Bold" pitchFamily="34" charset="-120"/>
+              </a:rPr>
+              <a:t>5</a:t>
+            </a:r>
+            <a:endParaRPr lang="en-US" sz="2200" dirty="0"/>
+          </a:p>
+        </p:txBody>
+      </p:sp>
+      <p:sp>
+        <p:nvSpPr>
+          <p:cNvPr id="17" name="Text 15"/>
+          <p:cNvSpPr/>
+          <p:nvPr/>
+        </p:nvSpPr>
+        <p:spPr>
+          <a:xfrm>
+            <a:off x="1275723" y="5310684"/>
+            <a:ext cx="10254497" cy="295275"/>
+          </a:xfrm>
+          <a:prstGeom prst="rect">
+            <a:avLst/>
+          </a:prstGeom>
+          <a:noFill/>
+          <a:ln/>
+        </p:spPr>
+        <p:txBody>
+          <a:bodyPr wrap="none" lIns="0" tIns="0" rIns="0" bIns="0" rtlCol="0" anchor="t"/>
+          <a:lstStyle/>
+          <a:p>
+            <a:pPr algn="l" indent="0" marL="0">
+              <a:lnSpc>
+                <a:spcPct val="104000"/>
+              </a:lnSpc>
+              <a:buNone/>
+            </a:pPr>
+            <a:r>
+              <a:rPr lang="en-US" sz="1850" b="1" dirty="0">
+                <a:solidFill>
+                  <a:srgbClr val="1C1C1C"/>
+                </a:solidFill>
+                <a:latin typeface="Orbitron Bold" pitchFamily="34" charset="0"/>
+                <a:ea typeface="Orbitron Bold" pitchFamily="34" charset="-122"/>
+                <a:cs typeface="Orbitron Bold" pitchFamily="34" charset="-120"/>
+              </a:rPr>
+              <a:t>Something inside must change the condition</a:t>
+            </a:r>
+            <a:endParaRPr lang="en-US" sz="1850" dirty="0"/>
+          </a:p>
+        </p:txBody>
+      </p:sp>
+      <p:sp>
+        <p:nvSpPr>
+          <p:cNvPr id="18" name="Text 16"/>
           <p:cNvSpPr/>
           <p:nvPr/>
         </p:nvSpPr>
@@ -3913,9 +4272,343 @@
           <a:chExt cx="0" cy="0"/>
         </a:xfrm>
       </p:grpSpPr>
+      <p:sp>
+        <p:nvSpPr>
+          <p:cNvPr id="2" name="Text 0"/>
+          <p:cNvSpPr/>
+          <p:nvPr/>
+        </p:nvSpPr>
+        <p:spPr>
+          <a:xfrm>
+            <a:off x="661475" y="1297980"/>
+            <a:ext cx="10868745" cy="590649"/>
+          </a:xfrm>
+          <a:prstGeom prst="rect">
+            <a:avLst/>
+          </a:prstGeom>
+          <a:noFill/>
+          <a:ln/>
+        </p:spPr>
+        <p:txBody>
+          <a:bodyPr wrap="none" lIns="0" tIns="0" rIns="0" bIns="0" rtlCol="0" anchor="t"/>
+          <a:lstStyle/>
+          <a:p>
+            <a:pPr algn="l" indent="0" marL="0">
+              <a:lnSpc>
+                <a:spcPct val="104000"/>
+              </a:lnSpc>
+              <a:buNone/>
+            </a:pPr>
+            <a:r>
+              <a:rPr lang="en-US" sz="3700" b="1" dirty="0">
+                <a:solidFill>
+                  <a:srgbClr val="111111"/>
+                </a:solidFill>
+                <a:latin typeface="Orbitron Bold" pitchFamily="34" charset="0"/>
+                <a:ea typeface="Orbitron Bold" pitchFamily="34" charset="-122"/>
+                <a:cs typeface="Orbitron Bold" pitchFamily="34" charset="-120"/>
+              </a:rPr>
+              <a:t>The wrong way: the loop that never ends</a:t>
+            </a:r>
+            <a:endParaRPr lang="en-US" sz="3700" dirty="0"/>
+          </a:p>
+        </p:txBody>
+      </p:sp>
+      <p:sp>
+        <p:nvSpPr>
+          <p:cNvPr id="3" name="Shape 1"/>
+          <p:cNvSpPr/>
+          <p:nvPr/>
+        </p:nvSpPr>
+        <p:spPr>
+          <a:xfrm>
+            <a:off x="661475" y="2384723"/>
+            <a:ext cx="5203794" cy="2494955"/>
+          </a:xfrm>
+          <a:prstGeom prst="roundRect">
+            <a:avLst>
+              <a:gd name="adj" fmla="val 3182"/>
+            </a:avLst>
+          </a:prstGeom>
+          <a:solidFill>
+            <a:srgbClr val="F2F2F2"/>
+          </a:solidFill>
+          <a:ln/>
+        </p:spPr>
+      </p:sp>
+      <p:sp>
+        <p:nvSpPr>
+          <p:cNvPr id="4" name="Text 2"/>
+          <p:cNvSpPr/>
+          <p:nvPr/>
+        </p:nvSpPr>
+        <p:spPr>
+          <a:xfrm>
+            <a:off x="888283" y="2573734"/>
+            <a:ext cx="4750177" cy="2116931"/>
+          </a:xfrm>
+          <a:prstGeom prst="rect">
+            <a:avLst/>
+          </a:prstGeom>
+          <a:noFill/>
+          <a:ln/>
+        </p:spPr>
+        <p:txBody>
+          <a:bodyPr wrap="square" lIns="0" tIns="0" rIns="0" bIns="0" rtlCol="0" anchor="t">
+            <a:normAutofit/>
+          </a:bodyPr>
+          <a:lstStyle/>
+          <a:p>
+            <a:pPr algn="l" indent="0" marL="0">
+              <a:lnSpc>
+                <a:spcPct val="133000"/>
+              </a:lnSpc>
+              <a:buNone/>
+            </a:pPr>
+            <a:r>
+              <a:rPr lang="en-US" sz="1450" dirty="0">
+                <a:solidFill>
+                  <a:srgbClr val="24292E"/>
+                </a:solidFill>
+                <a:latin typeface="Consolas" pitchFamily="34" charset="0"/>
+                <a:ea typeface="Consolas" pitchFamily="34" charset="-122"/>
+                <a:cs typeface="Consolas" pitchFamily="34" charset="-120"/>
+              </a:rPr>
+              <a:t>moves_left = 3</a:t>
+            </a:r>
+            <a:endParaRPr lang="en-US" sz="1450" dirty="0"/>
+          </a:p>
+          <a:p>
+            <a:pPr algn="l" indent="0" marL="0">
+              <a:lnSpc>
+                <a:spcPct val="133000"/>
+              </a:lnSpc>
+              <a:buNone/>
+            </a:pPr>
+            <a:endParaRPr lang="en-US" sz="1450" dirty="0"/>
+          </a:p>
+          <a:p>
+            <a:pPr algn="l" indent="0" marL="0">
+              <a:lnSpc>
+                <a:spcPct val="133000"/>
+              </a:lnSpc>
+              <a:buNone/>
+            </a:pPr>
+            <a:r>
+              <a:rPr lang="en-US" sz="1450" dirty="0">
+                <a:solidFill>
+                  <a:srgbClr val="24292E"/>
+                </a:solidFill>
+                <a:latin typeface="Consolas" pitchFamily="34" charset="0"/>
+                <a:ea typeface="Consolas" pitchFamily="34" charset="-122"/>
+                <a:cs typeface="Consolas" pitchFamily="34" charset="-120"/>
+              </a:rPr>
+              <a:t>while moves_left &gt; 0:</a:t>
+            </a:r>
+            <a:endParaRPr lang="en-US" sz="1450" dirty="0"/>
+          </a:p>
+          <a:p>
+            <a:pPr algn="l" indent="0" marL="0">
+              <a:lnSpc>
+                <a:spcPct val="133000"/>
+              </a:lnSpc>
+              <a:buNone/>
+            </a:pPr>
+            <a:r>
+              <a:rPr lang="en-US" sz="1450" dirty="0">
+                <a:solidFill>
+                  <a:srgbClr val="24292E"/>
+                </a:solidFill>
+                <a:latin typeface="Consolas" pitchFamily="34" charset="0"/>
+                <a:ea typeface="Consolas" pitchFamily="34" charset="-122"/>
+                <a:cs typeface="Consolas" pitchFamily="34" charset="-120"/>
+              </a:rPr>
+              <a:t>    print(f"Thunder rolls. Moves until the storm: {moves_left}")</a:t>
+            </a:r>
+            <a:endParaRPr lang="en-US" sz="1450" dirty="0"/>
+          </a:p>
+          <a:p>
+            <a:pPr algn="l" indent="0" marL="0">
+              <a:lnSpc>
+                <a:spcPct val="133000"/>
+              </a:lnSpc>
+              <a:buNone/>
+            </a:pPr>
+            <a:endParaRPr lang="en-US" sz="1450" dirty="0"/>
+          </a:p>
+          <a:p>
+            <a:pPr algn="l" indent="0" marL="0">
+              <a:lnSpc>
+                <a:spcPct val="133000"/>
+              </a:lnSpc>
+              <a:buNone/>
+            </a:pPr>
+            <a:r>
+              <a:rPr lang="en-US" sz="1450" dirty="0">
+                <a:solidFill>
+                  <a:srgbClr val="24292E"/>
+                </a:solidFill>
+                <a:latin typeface="Consolas" pitchFamily="34" charset="0"/>
+                <a:ea typeface="Consolas" pitchFamily="34" charset="-122"/>
+                <a:cs typeface="Consolas" pitchFamily="34" charset="-120"/>
+              </a:rPr>
+              <a:t>print("The storm has reached the ridge.")</a:t>
+            </a:r>
+            <a:endParaRPr lang="en-US" sz="1450" dirty="0"/>
+          </a:p>
+        </p:txBody>
+      </p:sp>
+      <p:sp>
+        <p:nvSpPr>
+          <p:cNvPr id="5" name="Shape 3"/>
+          <p:cNvSpPr/>
+          <p:nvPr/>
+        </p:nvSpPr>
+        <p:spPr>
+          <a:xfrm>
+            <a:off x="6332776" y="2384723"/>
+            <a:ext cx="5203794" cy="1587698"/>
+          </a:xfrm>
+          <a:prstGeom prst="roundRect">
+            <a:avLst>
+              <a:gd name="adj" fmla="val 5000"/>
+            </a:avLst>
+          </a:prstGeom>
+          <a:solidFill>
+            <a:srgbClr val="F2F2F2"/>
+          </a:solidFill>
+          <a:ln/>
+        </p:spPr>
+      </p:sp>
+      <p:sp>
+        <p:nvSpPr>
+          <p:cNvPr id="6" name="Text 4"/>
+          <p:cNvSpPr/>
+          <p:nvPr/>
+        </p:nvSpPr>
+        <p:spPr>
+          <a:xfrm>
+            <a:off x="6559584" y="2573734"/>
+            <a:ext cx="4750177" cy="1209675"/>
+          </a:xfrm>
+          <a:prstGeom prst="rect">
+            <a:avLst/>
+          </a:prstGeom>
+          <a:noFill/>
+          <a:ln/>
+        </p:spPr>
+        <p:txBody>
+          <a:bodyPr wrap="square" lIns="0" tIns="0" rIns="0" bIns="0" rtlCol="0" anchor="t">
+            <a:normAutofit/>
+          </a:bodyPr>
+          <a:lstStyle/>
+          <a:p>
+            <a:pPr algn="l" indent="0" marL="0">
+              <a:lnSpc>
+                <a:spcPct val="133000"/>
+              </a:lnSpc>
+              <a:buNone/>
+            </a:pPr>
+            <a:r>
+              <a:rPr lang="en-US" sz="1450" dirty="0">
+                <a:solidFill>
+                  <a:srgbClr val="24292E"/>
+                </a:solidFill>
+                <a:latin typeface="Consolas" pitchFamily="34" charset="0"/>
+                <a:ea typeface="Consolas" pitchFamily="34" charset="-122"/>
+                <a:cs typeface="Consolas" pitchFamily="34" charset="-120"/>
+              </a:rPr>
+              <a:t>Thunder rolls. Moves until the storm: 3</a:t>
+            </a:r>
+            <a:endParaRPr lang="en-US" sz="1450" dirty="0"/>
+          </a:p>
+          <a:p>
+            <a:pPr algn="l" indent="0" marL="0">
+              <a:lnSpc>
+                <a:spcPct val="133000"/>
+              </a:lnSpc>
+              <a:buNone/>
+            </a:pPr>
+            <a:r>
+              <a:rPr lang="en-US" sz="1450" dirty="0">
+                <a:solidFill>
+                  <a:srgbClr val="24292E"/>
+                </a:solidFill>
+                <a:latin typeface="Consolas" pitchFamily="34" charset="0"/>
+                <a:ea typeface="Consolas" pitchFamily="34" charset="-122"/>
+                <a:cs typeface="Consolas" pitchFamily="34" charset="-120"/>
+              </a:rPr>
+              <a:t>Thunder rolls. Moves until the storm: 3</a:t>
+            </a:r>
+            <a:endParaRPr lang="en-US" sz="1450" dirty="0"/>
+          </a:p>
+          <a:p>
+            <a:pPr algn="l" indent="0" marL="0">
+              <a:lnSpc>
+                <a:spcPct val="133000"/>
+              </a:lnSpc>
+              <a:buNone/>
+            </a:pPr>
+            <a:r>
+              <a:rPr lang="en-US" sz="1450" dirty="0">
+                <a:solidFill>
+                  <a:srgbClr val="24292E"/>
+                </a:solidFill>
+                <a:latin typeface="Consolas" pitchFamily="34" charset="0"/>
+                <a:ea typeface="Consolas" pitchFamily="34" charset="-122"/>
+                <a:cs typeface="Consolas" pitchFamily="34" charset="-120"/>
+              </a:rPr>
+              <a:t>...</a:t>
+            </a:r>
+            <a:endParaRPr lang="en-US" sz="1450" dirty="0"/>
+          </a:p>
+          <a:p>
+            <a:pPr algn="l" indent="0" marL="0">
+              <a:lnSpc>
+                <a:spcPct val="133000"/>
+              </a:lnSpc>
+              <a:buNone/>
+            </a:pPr>
+            <a:r>
+              <a:rPr lang="en-US" sz="1450" dirty="0">
+                <a:solidFill>
+                  <a:srgbClr val="24292E"/>
+                </a:solidFill>
+                <a:latin typeface="Consolas" pitchFamily="34" charset="0"/>
+                <a:ea typeface="Consolas" pitchFamily="34" charset="-122"/>
+                <a:cs typeface="Consolas" pitchFamily="34" charset="-120"/>
+              </a:rPr>
+              <a:t>KeyboardInterrupt</a:t>
+            </a:r>
+            <a:endParaRPr lang="en-US" sz="1450" dirty="0"/>
+          </a:p>
+        </p:txBody>
+      </p:sp>
+      <p:sp>
+        <p:nvSpPr>
+          <p:cNvPr id="7" name="Shape 5"/>
+          <p:cNvSpPr/>
+          <p:nvPr/>
+        </p:nvSpPr>
+        <p:spPr>
+          <a:xfrm>
+            <a:off x="6332776" y="4185047"/>
+            <a:ext cx="5203794" cy="1039416"/>
+          </a:xfrm>
+          <a:prstGeom prst="roundRect">
+            <a:avLst>
+              <a:gd name="adj" fmla="val 7638"/>
+            </a:avLst>
+          </a:prstGeom>
+          <a:solidFill>
+            <a:srgbClr val="FFB3B4"/>
+          </a:solidFill>
+          <a:ln/>
+        </p:spPr>
+      </p:sp>
       <p:pic>
         <p:nvPicPr>
-          <p:cNvPr id="2" name="Image 0" descr="preencoded.png">    </p:cNvPr>
+          <p:cNvPr id="8" name="Image 0" descr="preencoded.png">    </p:cNvPr>
           <p:cNvPicPr>
             <a:picLocks noChangeAspect="1"/>
           </p:cNvPicPr>
@@ -3929,8 +4622,8 @@
         </p:blipFill>
         <p:spPr>
           <a:xfrm>
-            <a:off x="7619809" y="0"/>
-            <a:ext cx="4571886" cy="6858000"/>
+            <a:off x="6521783" y="4471789"/>
+            <a:ext cx="236234" cy="189012"/>
           </a:xfrm>
           <a:prstGeom prst="rect">
             <a:avLst/>
@@ -3939,14 +4632,14 @@
       </p:pic>
       <p:sp>
         <p:nvSpPr>
-          <p:cNvPr id="3" name="Text 0"/>
-          <p:cNvSpPr/>
-          <p:nvPr/>
-        </p:nvSpPr>
-        <p:spPr>
-          <a:xfrm>
-            <a:off x="661475" y="872629"/>
-            <a:ext cx="6296860" cy="1181298"/>
+          <p:cNvPr id="9" name="Text 6"/>
+          <p:cNvSpPr/>
+          <p:nvPr/>
+        </p:nvSpPr>
+        <p:spPr>
+          <a:xfrm>
+            <a:off x="6947024" y="4402336"/>
+            <a:ext cx="4400539" cy="604838"/>
           </a:xfrm>
           <a:prstGeom prst="rect">
             <a:avLst/>
@@ -3962,72 +4655,6 @@
           <a:p>
             <a:pPr algn="l" indent="0" marL="0">
               <a:lnSpc>
-                <a:spcPct val="104000"/>
-              </a:lnSpc>
-              <a:buNone/>
-            </a:pPr>
-            <a:r>
-              <a:rPr lang="en-US" sz="3700" b="1" dirty="0">
-                <a:solidFill>
-                  <a:srgbClr val="111111"/>
-                </a:solidFill>
-                <a:latin typeface="Orbitron Bold" pitchFamily="34" charset="0"/>
-                <a:ea typeface="Orbitron Bold" pitchFamily="34" charset="-122"/>
-                <a:cs typeface="Orbitron Bold" pitchFamily="34" charset="-120"/>
-              </a:rPr>
-              <a:t>The wrong way: the loop that never ends</a:t>
-            </a:r>
-            <a:endParaRPr lang="en-US" sz="3700" dirty="0"/>
-          </a:p>
-        </p:txBody>
-      </p:sp>
-      <p:sp>
-        <p:nvSpPr>
-          <p:cNvPr id="4" name="Shape 1"/>
-          <p:cNvSpPr/>
-          <p:nvPr/>
-        </p:nvSpPr>
-        <p:spPr>
-          <a:xfrm>
-            <a:off x="661475" y="2550021"/>
-            <a:ext cx="2917851" cy="3099792"/>
-          </a:xfrm>
-          <a:prstGeom prst="roundRect">
-            <a:avLst>
-              <a:gd name="adj" fmla="val 2721"/>
-            </a:avLst>
-          </a:prstGeom>
-          <a:solidFill>
-            <a:srgbClr val="F2F2F2"/>
-          </a:solidFill>
-          <a:ln/>
-        </p:spPr>
-      </p:sp>
-      <p:sp>
-        <p:nvSpPr>
-          <p:cNvPr id="5" name="Text 2"/>
-          <p:cNvSpPr/>
-          <p:nvPr/>
-        </p:nvSpPr>
-        <p:spPr>
-          <a:xfrm>
-            <a:off x="888283" y="2739033"/>
-            <a:ext cx="2464234" cy="2721769"/>
-          </a:xfrm>
-          <a:prstGeom prst="rect">
-            <a:avLst/>
-          </a:prstGeom>
-          <a:noFill/>
-          <a:ln/>
-        </p:spPr>
-        <p:txBody>
-          <a:bodyPr wrap="square" lIns="0" tIns="0" rIns="0" bIns="0" rtlCol="0" anchor="t">
-            <a:normAutofit/>
-          </a:bodyPr>
-          <a:lstStyle/>
-          <a:p>
-            <a:pPr algn="l" indent="0" marL="0">
-              <a:lnSpc>
                 <a:spcPct val="133000"/>
               </a:lnSpc>
               <a:buNone/>
@@ -4035,225 +4662,21 @@
             <a:r>
               <a:rPr lang="en-US" sz="1450" dirty="0">
                 <a:solidFill>
-                  <a:srgbClr val="24292E"/>
-                </a:solidFill>
-                <a:latin typeface="Consolas" pitchFamily="34" charset="0"/>
-                <a:ea typeface="Consolas" pitchFamily="34" charset="-122"/>
-                <a:cs typeface="Consolas" pitchFamily="34" charset="-120"/>
-              </a:rPr>
-              <a:t>moves_left = 3</a:t>
+                  <a:srgbClr val="000000"/>
+                </a:solidFill>
+                <a:latin typeface="Roboto Condensed" pitchFamily="34" charset="0"/>
+                <a:ea typeface="Roboto Condensed" pitchFamily="34" charset="-122"/>
+                <a:cs typeface="Roboto Condensed" pitchFamily="34" charset="-120"/>
+              </a:rPr>
+              <a:t>The counter never changes, so the condition never becomes False.</a:t>
             </a:r>
             <a:endParaRPr lang="en-US" sz="1450" dirty="0"/>
           </a:p>
-          <a:p>
-            <a:pPr algn="l" indent="0" marL="0">
-              <a:lnSpc>
-                <a:spcPct val="133000"/>
-              </a:lnSpc>
-              <a:buNone/>
-            </a:pPr>
-            <a:endParaRPr lang="en-US" sz="1450" dirty="0"/>
-          </a:p>
-          <a:p>
-            <a:pPr algn="l" indent="0" marL="0">
-              <a:lnSpc>
-                <a:spcPct val="133000"/>
-              </a:lnSpc>
-              <a:buNone/>
-            </a:pPr>
-            <a:r>
-              <a:rPr lang="en-US" sz="1450" dirty="0">
-                <a:solidFill>
-                  <a:srgbClr val="24292E"/>
-                </a:solidFill>
-                <a:latin typeface="Consolas" pitchFamily="34" charset="0"/>
-                <a:ea typeface="Consolas" pitchFamily="34" charset="-122"/>
-                <a:cs typeface="Consolas" pitchFamily="34" charset="-120"/>
-              </a:rPr>
-              <a:t>while moves_left &gt; 0:</a:t>
-            </a:r>
-            <a:endParaRPr lang="en-US" sz="1450" dirty="0"/>
-          </a:p>
-          <a:p>
-            <a:pPr algn="l" indent="0" marL="0">
-              <a:lnSpc>
-                <a:spcPct val="133000"/>
-              </a:lnSpc>
-              <a:buNone/>
-            </a:pPr>
-            <a:r>
-              <a:rPr lang="en-US" sz="1450" dirty="0">
-                <a:solidFill>
-                  <a:srgbClr val="24292E"/>
-                </a:solidFill>
-                <a:latin typeface="Consolas" pitchFamily="34" charset="0"/>
-                <a:ea typeface="Consolas" pitchFamily="34" charset="-122"/>
-                <a:cs typeface="Consolas" pitchFamily="34" charset="-120"/>
-              </a:rPr>
-              <a:t>    print(f"Thunder rolls. Moves until the storm: {moves_left}")</a:t>
-            </a:r>
-            <a:endParaRPr lang="en-US" sz="1450" dirty="0"/>
-          </a:p>
-          <a:p>
-            <a:pPr algn="l" indent="0" marL="0">
-              <a:lnSpc>
-                <a:spcPct val="133000"/>
-              </a:lnSpc>
-              <a:buNone/>
-            </a:pPr>
-            <a:endParaRPr lang="en-US" sz="1450" dirty="0"/>
-          </a:p>
-          <a:p>
-            <a:pPr algn="l" indent="0" marL="0">
-              <a:lnSpc>
-                <a:spcPct val="133000"/>
-              </a:lnSpc>
-              <a:buNone/>
-            </a:pPr>
-            <a:r>
-              <a:rPr lang="en-US" sz="1450" dirty="0">
-                <a:solidFill>
-                  <a:srgbClr val="24292E"/>
-                </a:solidFill>
-                <a:latin typeface="Consolas" pitchFamily="34" charset="0"/>
-                <a:ea typeface="Consolas" pitchFamily="34" charset="-122"/>
-                <a:cs typeface="Consolas" pitchFamily="34" charset="-120"/>
-              </a:rPr>
-              <a:t>print("The storm has reached the ridge.")</a:t>
-            </a:r>
-            <a:endParaRPr lang="en-US" sz="1450" dirty="0"/>
-          </a:p>
-        </p:txBody>
-      </p:sp>
-      <p:sp>
-        <p:nvSpPr>
-          <p:cNvPr id="6" name="Shape 3"/>
-          <p:cNvSpPr/>
-          <p:nvPr/>
-        </p:nvSpPr>
-        <p:spPr>
-          <a:xfrm>
-            <a:off x="4046833" y="2550021"/>
-            <a:ext cx="2917851" cy="2192536"/>
-          </a:xfrm>
-          <a:prstGeom prst="roundRect">
-            <a:avLst>
-              <a:gd name="adj" fmla="val 3621"/>
-            </a:avLst>
-          </a:prstGeom>
-          <a:solidFill>
-            <a:srgbClr val="F2F2F2"/>
-          </a:solidFill>
-          <a:ln/>
-        </p:spPr>
-      </p:sp>
-      <p:sp>
-        <p:nvSpPr>
-          <p:cNvPr id="7" name="Text 4"/>
-          <p:cNvSpPr/>
-          <p:nvPr/>
-        </p:nvSpPr>
-        <p:spPr>
-          <a:xfrm>
-            <a:off x="4273642" y="2739033"/>
-            <a:ext cx="2464234" cy="1814513"/>
-          </a:xfrm>
-          <a:prstGeom prst="rect">
-            <a:avLst/>
-          </a:prstGeom>
-          <a:noFill/>
-          <a:ln/>
-        </p:spPr>
-        <p:txBody>
-          <a:bodyPr wrap="square" lIns="0" tIns="0" rIns="0" bIns="0" rtlCol="0" anchor="t">
-            <a:normAutofit/>
-          </a:bodyPr>
-          <a:lstStyle/>
-          <a:p>
-            <a:pPr algn="l" indent="0" marL="0">
-              <a:lnSpc>
-                <a:spcPct val="133000"/>
-              </a:lnSpc>
-              <a:buNone/>
-            </a:pPr>
-            <a:r>
-              <a:rPr lang="en-US" sz="1450" dirty="0">
-                <a:solidFill>
-                  <a:srgbClr val="24292E"/>
-                </a:solidFill>
-                <a:latin typeface="Consolas" pitchFamily="34" charset="0"/>
-                <a:ea typeface="Consolas" pitchFamily="34" charset="-122"/>
-                <a:cs typeface="Consolas" pitchFamily="34" charset="-120"/>
-              </a:rPr>
-              <a:t>Thunder rolls. Moves until the storm: 3</a:t>
-            </a:r>
-            <a:endParaRPr lang="en-US" sz="1450" dirty="0"/>
-          </a:p>
-          <a:p>
-            <a:pPr algn="l" indent="0" marL="0">
-              <a:lnSpc>
-                <a:spcPct val="133000"/>
-              </a:lnSpc>
-              <a:buNone/>
-            </a:pPr>
-            <a:r>
-              <a:rPr lang="en-US" sz="1450" dirty="0">
-                <a:solidFill>
-                  <a:srgbClr val="24292E"/>
-                </a:solidFill>
-                <a:latin typeface="Consolas" pitchFamily="34" charset="0"/>
-                <a:ea typeface="Consolas" pitchFamily="34" charset="-122"/>
-                <a:cs typeface="Consolas" pitchFamily="34" charset="-120"/>
-              </a:rPr>
-              <a:t>Thunder rolls. Moves until the storm: 3</a:t>
-            </a:r>
-            <a:endParaRPr lang="en-US" sz="1450" dirty="0"/>
-          </a:p>
-          <a:p>
-            <a:pPr algn="l" indent="0" marL="0">
-              <a:lnSpc>
-                <a:spcPct val="133000"/>
-              </a:lnSpc>
-              <a:buNone/>
-            </a:pPr>
-            <a:r>
-              <a:rPr lang="en-US" sz="1450" dirty="0">
-                <a:solidFill>
-                  <a:srgbClr val="24292E"/>
-                </a:solidFill>
-                <a:latin typeface="Consolas" pitchFamily="34" charset="0"/>
-                <a:ea typeface="Consolas" pitchFamily="34" charset="-122"/>
-                <a:cs typeface="Consolas" pitchFamily="34" charset="-120"/>
-              </a:rPr>
-              <a:t>...</a:t>
-            </a:r>
-            <a:endParaRPr lang="en-US" sz="1450" dirty="0"/>
-          </a:p>
-          <a:p>
-            <a:pPr algn="l" indent="0" marL="0">
-              <a:lnSpc>
-                <a:spcPct val="133000"/>
-              </a:lnSpc>
-              <a:buNone/>
-            </a:pPr>
-            <a:r>
-              <a:rPr lang="en-US" sz="1450" dirty="0">
-                <a:solidFill>
-                  <a:srgbClr val="24292E"/>
-                </a:solidFill>
-                <a:latin typeface="Consolas" pitchFamily="34" charset="0"/>
-                <a:ea typeface="Consolas" pitchFamily="34" charset="-122"/>
-                <a:cs typeface="Consolas" pitchFamily="34" charset="-120"/>
-              </a:rPr>
-              <a:t>KeyboardInterrupt</a:t>
-            </a:r>
-            <a:endParaRPr lang="en-US" sz="1450" dirty="0"/>
-          </a:p>
-        </p:txBody>
-      </p:sp>
-      <p:sp>
-        <p:nvSpPr>
-          <p:cNvPr id="8" name="Text 5"/>
+        </p:txBody>
+      </p:sp>
+      <p:sp>
+        <p:nvSpPr>
+          <p:cNvPr id="10" name="Text 7"/>
           <p:cNvSpPr/>
           <p:nvPr/>
         </p:nvSpPr>
@@ -4727,7 +5150,7 @@
         </p:blipFill>
         <p:spPr>
           <a:xfrm>
-            <a:off x="0" y="0"/>
+            <a:off x="7619809" y="0"/>
             <a:ext cx="4571886" cy="6858000"/>
           </a:xfrm>
           <a:prstGeom prst="rect">
@@ -4743,7 +5166,7 @@
         </p:nvSpPr>
         <p:spPr>
           <a:xfrm>
-            <a:off x="5233360" y="1574998"/>
+            <a:off x="661475" y="1574998"/>
             <a:ext cx="6296860" cy="590649"/>
           </a:xfrm>
           <a:prstGeom prst="rect">
@@ -4777,43 +5200,46 @@
           </a:p>
         </p:txBody>
       </p:sp>
-      <p:sp>
-        <p:nvSpPr>
-          <p:cNvPr id="4" name="Shape 1"/>
-          <p:cNvSpPr/>
-          <p:nvPr/>
-        </p:nvSpPr>
-        <p:spPr>
-          <a:xfrm>
-            <a:off x="5233360" y="2661741"/>
+      <p:pic>
+        <p:nvPicPr>
+          <p:cNvPr id="4" name="Image 1" descr="preencoded.png">    </p:cNvPr>
+          <p:cNvPicPr>
+            <a:picLocks noChangeAspect="1"/>
+          </p:cNvPicPr>
+          <p:nvPr/>
+        </p:nvPicPr>
+        <p:blipFill>
+          <a:blip r:embed="rId2">
+            <a:extLst>
+              <a:ext uri="{96DAC541-7B7A-43D3-8B79-37D633B846F1}">
+                <asvg:svgBlip xmlns:asvg="http://schemas.microsoft.com/office/drawing/2016/SVG/main" r:embed="rId3"/>
+              </a:ext>
+            </a:extLst>
+          </a:blip>
+          <a:stretch>
+            <a:fillRect/>
+          </a:stretch>
+        </p:blipFill>
+        <p:spPr>
+          <a:xfrm>
+            <a:off x="661475" y="2661741"/>
             <a:ext cx="2917851" cy="1990427"/>
           </a:xfrm>
-          <a:prstGeom prst="roundRect">
-            <a:avLst>
-              <a:gd name="adj" fmla="val 3988"/>
-            </a:avLst>
-          </a:prstGeom>
-          <a:solidFill>
-            <a:srgbClr val="FFFFFF"/>
-          </a:solidFill>
-          <a:ln w="25399">
-            <a:solidFill>
-              <a:srgbClr val="B7CBE0"/>
-            </a:solidFill>
-            <a:prstDash val="solid"/>
-          </a:ln>
-        </p:spPr>
-      </p:sp>
-      <p:sp>
-        <p:nvSpPr>
-          <p:cNvPr id="5" name="Text 2"/>
-          <p:cNvSpPr/>
-          <p:nvPr/>
-        </p:nvSpPr>
-        <p:spPr>
-          <a:xfrm>
-            <a:off x="5447767" y="2876153"/>
-            <a:ext cx="2489039" cy="295275"/>
+          <a:prstGeom prst="rect">
+            <a:avLst/>
+          </a:prstGeom>
+        </p:spPr>
+      </p:pic>
+      <p:sp>
+        <p:nvSpPr>
+          <p:cNvPr id="5" name="Text 1"/>
+          <p:cNvSpPr/>
+          <p:nvPr/>
+        </p:nvSpPr>
+        <p:spPr>
+          <a:xfrm>
+            <a:off x="977479" y="2876153"/>
+            <a:ext cx="2387441" cy="295275"/>
           </a:xfrm>
           <a:prstGeom prst="rect">
             <a:avLst/>
@@ -4848,14 +5274,14 @@
       </p:sp>
       <p:sp>
         <p:nvSpPr>
-          <p:cNvPr id="6" name="Text 3"/>
-          <p:cNvSpPr/>
-          <p:nvPr/>
-        </p:nvSpPr>
-        <p:spPr>
-          <a:xfrm>
-            <a:off x="5447767" y="3360440"/>
-            <a:ext cx="2489039" cy="1077317"/>
+          <p:cNvPr id="6" name="Text 2"/>
+          <p:cNvSpPr/>
+          <p:nvPr/>
+        </p:nvSpPr>
+        <p:spPr>
+          <a:xfrm>
+            <a:off x="977479" y="3360440"/>
+            <a:ext cx="2387441" cy="1077317"/>
           </a:xfrm>
           <a:prstGeom prst="rect">
             <a:avLst/>
@@ -4911,43 +5337,46 @@
           </a:p>
         </p:txBody>
       </p:sp>
-      <p:sp>
-        <p:nvSpPr>
-          <p:cNvPr id="7" name="Shape 4"/>
-          <p:cNvSpPr/>
-          <p:nvPr/>
-        </p:nvSpPr>
-        <p:spPr>
-          <a:xfrm>
-            <a:off x="8618719" y="2661741"/>
+      <p:pic>
+        <p:nvPicPr>
+          <p:cNvPr id="7" name="Image 2" descr="preencoded.png">    </p:cNvPr>
+          <p:cNvPicPr>
+            <a:picLocks noChangeAspect="1"/>
+          </p:cNvPicPr>
+          <p:nvPr/>
+        </p:nvPicPr>
+        <p:blipFill>
+          <a:blip r:embed="rId4">
+            <a:extLst>
+              <a:ext uri="{96DAC541-7B7A-43D3-8B79-37D633B846F1}">
+                <asvg:svgBlip xmlns:asvg="http://schemas.microsoft.com/office/drawing/2016/SVG/main" r:embed="rId5"/>
+              </a:ext>
+            </a:extLst>
+          </a:blip>
+          <a:stretch>
+            <a:fillRect/>
+          </a:stretch>
+        </p:blipFill>
+        <p:spPr>
+          <a:xfrm>
+            <a:off x="4046833" y="2661741"/>
             <a:ext cx="2917851" cy="2285702"/>
           </a:xfrm>
-          <a:prstGeom prst="roundRect">
-            <a:avLst>
-              <a:gd name="adj" fmla="val 3473"/>
-            </a:avLst>
-          </a:prstGeom>
-          <a:solidFill>
-            <a:srgbClr val="FFFFFF"/>
-          </a:solidFill>
-          <a:ln w="25399">
-            <a:solidFill>
-              <a:srgbClr val="B7CBE0"/>
-            </a:solidFill>
-            <a:prstDash val="solid"/>
-          </a:ln>
-        </p:spPr>
-      </p:sp>
-      <p:sp>
-        <p:nvSpPr>
-          <p:cNvPr id="8" name="Text 5"/>
-          <p:cNvSpPr/>
-          <p:nvPr/>
-        </p:nvSpPr>
-        <p:spPr>
-          <a:xfrm>
-            <a:off x="8833125" y="2876153"/>
-            <a:ext cx="2489039" cy="590550"/>
+          <a:prstGeom prst="rect">
+            <a:avLst/>
+          </a:prstGeom>
+        </p:spPr>
+      </p:pic>
+      <p:sp>
+        <p:nvSpPr>
+          <p:cNvPr id="8" name="Text 3"/>
+          <p:cNvSpPr/>
+          <p:nvPr/>
+        </p:nvSpPr>
+        <p:spPr>
+          <a:xfrm>
+            <a:off x="4362837" y="2876153"/>
+            <a:ext cx="2387441" cy="590550"/>
           </a:xfrm>
           <a:prstGeom prst="rect">
             <a:avLst/>
@@ -4984,14 +5413,14 @@
       </p:sp>
       <p:sp>
         <p:nvSpPr>
-          <p:cNvPr id="9" name="Text 6"/>
-          <p:cNvSpPr/>
-          <p:nvPr/>
-        </p:nvSpPr>
-        <p:spPr>
-          <a:xfrm>
-            <a:off x="8833125" y="3655715"/>
-            <a:ext cx="2489039" cy="1077317"/>
+          <p:cNvPr id="9" name="Text 4"/>
+          <p:cNvSpPr/>
+          <p:nvPr/>
+        </p:nvSpPr>
+        <p:spPr>
+          <a:xfrm>
+            <a:off x="4362837" y="3655715"/>
+            <a:ext cx="2387441" cy="1077317"/>
           </a:xfrm>
           <a:prstGeom prst="rect">
             <a:avLst/>
@@ -5049,13 +5478,13 @@
       </p:sp>
       <p:sp>
         <p:nvSpPr>
-          <p:cNvPr id="10" name="Text 7"/>
-          <p:cNvSpPr/>
-          <p:nvPr/>
-        </p:nvSpPr>
-        <p:spPr>
-          <a:xfrm>
-            <a:off x="4704141" y="6457255"/>
+          <p:cNvPr id="10" name="Text 5"/>
+          <p:cNvSpPr/>
+          <p:nvPr/>
+        </p:nvSpPr>
+        <p:spPr>
+          <a:xfrm>
+            <a:off x="132255" y="6457255"/>
             <a:ext cx="3640642" cy="158750"/>
           </a:xfrm>
           <a:prstGeom prst="rect">
@@ -5448,7 +5877,134 @@
       </p:sp>
       <p:sp>
         <p:nvSpPr>
-          <p:cNvPr id="7" name="Text 5"/>
+          <p:cNvPr id="7" name="Shape 5"/>
+          <p:cNvSpPr/>
+          <p:nvPr/>
+        </p:nvSpPr>
+        <p:spPr>
+          <a:xfrm>
+            <a:off x="6332776" y="3903861"/>
+            <a:ext cx="5203794" cy="1045766"/>
+          </a:xfrm>
+          <a:prstGeom prst="roundRect">
+            <a:avLst>
+              <a:gd name="adj" fmla="val 7591"/>
+            </a:avLst>
+          </a:prstGeom>
+          <a:solidFill>
+            <a:srgbClr val="D1E5FA"/>
+          </a:solidFill>
+          <a:ln/>
+        </p:spPr>
+      </p:sp>
+      <p:pic>
+        <p:nvPicPr>
+          <p:cNvPr id="8" name="Image 0" descr="preencoded.png">    </p:cNvPr>
+          <p:cNvPicPr>
+            <a:picLocks noChangeAspect="1"/>
+          </p:cNvPicPr>
+          <p:nvPr/>
+        </p:nvPicPr>
+        <p:blipFill>
+          <a:blip r:embed="rId1"/>
+          <a:stretch>
+            <a:fillRect/>
+          </a:stretch>
+        </p:blipFill>
+        <p:spPr>
+          <a:xfrm>
+            <a:off x="6521783" y="4190603"/>
+            <a:ext cx="236234" cy="189012"/>
+          </a:xfrm>
+          <a:prstGeom prst="rect">
+            <a:avLst/>
+          </a:prstGeom>
+        </p:spPr>
+      </p:pic>
+      <p:sp>
+        <p:nvSpPr>
+          <p:cNvPr id="9" name="Text 6"/>
+          <p:cNvSpPr/>
+          <p:nvPr/>
+        </p:nvSpPr>
+        <p:spPr>
+          <a:xfrm>
+            <a:off x="6947024" y="4121150"/>
+            <a:ext cx="4400539" cy="611188"/>
+          </a:xfrm>
+          <a:prstGeom prst="rect">
+            <a:avLst/>
+          </a:prstGeom>
+          <a:noFill/>
+          <a:ln/>
+        </p:spPr>
+        <p:txBody>
+          <a:bodyPr wrap="square" lIns="0" tIns="0" rIns="0" bIns="0" rtlCol="0" anchor="t">
+            <a:normAutofit/>
+          </a:bodyPr>
+          <a:lstStyle/>
+          <a:p>
+            <a:pPr algn="l" indent="0" marL="0">
+              <a:lnSpc>
+                <a:spcPct val="133000"/>
+              </a:lnSpc>
+              <a:buNone/>
+            </a:pPr>
+            <a:r>
+              <a:rPr lang="en-US" sz="1450" dirty="0">
+                <a:solidFill>
+                  <a:srgbClr val="000000"/>
+                </a:solidFill>
+                <a:latin typeface="Roboto Condensed" pitchFamily="34" charset="0"/>
+                <a:ea typeface="Roboto Condensed" pitchFamily="34" charset="-122"/>
+                <a:cs typeface="Roboto Condensed" pitchFamily="34" charset="-120"/>
+              </a:rPr>
+              <a:t>The loop runs while </a:t>
+            </a:r>
+            <a:pPr algn="l" indent="0" marL="0">
+              <a:lnSpc>
+                <a:spcPct val="133000"/>
+              </a:lnSpc>
+              <a:buNone/>
+            </a:pPr>
+            <a:r>
+              <a:rPr lang="en-US" sz="1450" dirty="0">
+                <a:solidFill>
+                  <a:srgbClr val="000000"/>
+                </a:solidFill>
+                <a:highlight>
+                  <a:srgbClr val="F2F2F2"/>
+                </a:highlight>
+                <a:latin typeface="Consolas" pitchFamily="34" charset="0"/>
+                <a:ea typeface="Consolas" pitchFamily="34" charset="-122"/>
+                <a:cs typeface="Consolas" pitchFamily="34" charset="-120"/>
+              </a:rPr>
+              <a:t>lap &lt; laps_required</a:t>
+            </a:r>
+            <a:pPr algn="l" indent="0" marL="0">
+              <a:lnSpc>
+                <a:spcPct val="133000"/>
+              </a:lnSpc>
+              <a:buNone/>
+            </a:pPr>
+            <a:r>
+              <a:rPr lang="en-US" sz="1450" dirty="0">
+                <a:solidFill>
+                  <a:srgbClr val="000000"/>
+                </a:solidFill>
+                <a:latin typeface="Roboto Condensed" pitchFamily="34" charset="0"/>
+                <a:ea typeface="Roboto Condensed" pitchFamily="34" charset="-122"/>
+                <a:cs typeface="Roboto Condensed" pitchFamily="34" charset="-120"/>
+              </a:rPr>
+              <a:t>, so lap 3 is never printed.</a:t>
+            </a:r>
+            <a:endParaRPr lang="en-US" sz="1450" dirty="0"/>
+          </a:p>
+        </p:txBody>
+      </p:sp>
+      <p:sp>
+        <p:nvSpPr>
+          <p:cNvPr id="10" name="Text 7"/>
           <p:cNvSpPr/>
           <p:nvPr/>
         </p:nvSpPr>
@@ -5513,40 +6069,120 @@
           <a:chExt cx="0" cy="0"/>
         </a:xfrm>
       </p:grpSpPr>
-      <p:pic>
-        <p:nvPicPr>
-          <p:cNvPr id="2" name="Image 0" descr="preencoded.png">    </p:cNvPr>
-          <p:cNvPicPr>
-            <a:picLocks noChangeAspect="1"/>
-          </p:cNvPicPr>
-          <p:nvPr/>
-        </p:nvPicPr>
-        <p:blipFill>
-          <a:blip r:embed="rId1"/>
-          <a:stretch>
-            <a:fillRect/>
-          </a:stretch>
-        </p:blipFill>
-        <p:spPr>
-          <a:xfrm>
-            <a:off x="0" y="0"/>
-            <a:ext cx="4571886" cy="6858000"/>
-          </a:xfrm>
-          <a:prstGeom prst="rect">
-            <a:avLst/>
-          </a:prstGeom>
-        </p:spPr>
-      </p:pic>
-      <p:sp>
-        <p:nvSpPr>
-          <p:cNvPr id="3" name="Text 0"/>
-          <p:cNvSpPr/>
-          <p:nvPr/>
-        </p:nvSpPr>
-        <p:spPr>
-          <a:xfrm>
-            <a:off x="5233360" y="524173"/>
-            <a:ext cx="6296860" cy="1162844"/>
+      <p:sp>
+        <p:nvSpPr>
+          <p:cNvPr id="2" name="Text 0"/>
+          <p:cNvSpPr/>
+          <p:nvPr/>
+        </p:nvSpPr>
+        <p:spPr>
+          <a:xfrm>
+            <a:off x="661475" y="1615380"/>
+            <a:ext cx="10868745" cy="590649"/>
+          </a:xfrm>
+          <a:prstGeom prst="rect">
+            <a:avLst/>
+          </a:prstGeom>
+          <a:noFill/>
+          <a:ln/>
+        </p:spPr>
+        <p:txBody>
+          <a:bodyPr wrap="none" lIns="0" tIns="0" rIns="0" bIns="0" rtlCol="0" anchor="t"/>
+          <a:lstStyle/>
+          <a:p>
+            <a:pPr algn="l" indent="0" marL="0">
+              <a:lnSpc>
+                <a:spcPct val="104000"/>
+              </a:lnSpc>
+              <a:buNone/>
+            </a:pPr>
+            <a:r>
+              <a:rPr lang="en-US" sz="3700" b="1" dirty="0">
+                <a:solidFill>
+                  <a:srgbClr val="111111"/>
+                </a:solidFill>
+                <a:latin typeface="Orbitron Bold" pitchFamily="34" charset="0"/>
+                <a:ea typeface="Orbitron Bold" pitchFamily="34" charset="-122"/>
+                <a:cs typeface="Orbitron Bold" pitchFamily="34" charset="-120"/>
+              </a:rPr>
+              <a:t>Eleventh time, same shape</a:t>
+            </a:r>
+            <a:endParaRPr lang="en-US" sz="3700" dirty="0"/>
+          </a:p>
+        </p:txBody>
+      </p:sp>
+      <p:sp>
+        <p:nvSpPr>
+          <p:cNvPr id="3" name="Text 1"/>
+          <p:cNvSpPr/>
+          <p:nvPr/>
+        </p:nvSpPr>
+        <p:spPr>
+          <a:xfrm>
+            <a:off x="661475" y="2584053"/>
+            <a:ext cx="378014" cy="236240"/>
+          </a:xfrm>
+          <a:prstGeom prst="rect">
+            <a:avLst/>
+          </a:prstGeom>
+          <a:noFill/>
+          <a:ln/>
+        </p:spPr>
+        <p:txBody>
+          <a:bodyPr wrap="none" lIns="0" tIns="0" rIns="0" bIns="0" rtlCol="0" anchor="ctr"/>
+          <a:lstStyle/>
+          <a:p>
+            <a:pPr algn="l" indent="0" marL="0">
+              <a:lnSpc>
+                <a:spcPct val="100000"/>
+              </a:lnSpc>
+              <a:buNone/>
+            </a:pPr>
+            <a:r>
+              <a:rPr lang="en-US" sz="1450" dirty="0">
+                <a:solidFill>
+                  <a:srgbClr val="1C1C1C"/>
+                </a:solidFill>
+                <a:latin typeface="Orbitron" pitchFamily="34" charset="0"/>
+                <a:ea typeface="Orbitron" pitchFamily="34" charset="-122"/>
+                <a:cs typeface="Orbitron" pitchFamily="34" charset="-120"/>
+              </a:rPr>
+              <a:t>01</a:t>
+            </a:r>
+            <a:endParaRPr lang="en-US" sz="1450" dirty="0"/>
+          </a:p>
+        </p:txBody>
+      </p:sp>
+      <p:sp>
+        <p:nvSpPr>
+          <p:cNvPr id="4" name="Shape 2"/>
+          <p:cNvSpPr/>
+          <p:nvPr/>
+        </p:nvSpPr>
+        <p:spPr>
+          <a:xfrm>
+            <a:off x="661475" y="2879923"/>
+            <a:ext cx="3496877" cy="25400"/>
+          </a:xfrm>
+          <a:prstGeom prst="rect">
+            <a:avLst/>
+          </a:prstGeom>
+          <a:solidFill>
+            <a:srgbClr val="57A1EB"/>
+          </a:solidFill>
+          <a:ln/>
+        </p:spPr>
+      </p:sp>
+      <p:sp>
+        <p:nvSpPr>
+          <p:cNvPr id="5" name="Text 3"/>
+          <p:cNvSpPr/>
+          <p:nvPr/>
+        </p:nvSpPr>
+        <p:spPr>
+          <a:xfrm>
+            <a:off x="661475" y="3025180"/>
+            <a:ext cx="3496877" cy="590550"/>
           </a:xfrm>
           <a:prstGeom prst="rect">
             <a:avLst/>
@@ -5567,101 +6203,92 @@
               <a:buNone/>
             </a:pPr>
             <a:r>
-              <a:rPr lang="en-US" sz="3650" b="1" dirty="0">
-                <a:solidFill>
-                  <a:srgbClr val="111111"/>
+              <a:rPr lang="en-US" sz="1850" b="1" dirty="0">
+                <a:solidFill>
+                  <a:srgbClr val="1C1C1C"/>
                 </a:solidFill>
                 <a:latin typeface="Orbitron Bold" pitchFamily="34" charset="0"/>
                 <a:ea typeface="Orbitron Bold" pitchFamily="34" charset="-122"/>
                 <a:cs typeface="Orbitron Bold" pitchFamily="34" charset="-120"/>
               </a:rPr>
-              <a:t>Eleventh time, same shape</a:t>
-            </a:r>
-            <a:endParaRPr lang="en-US" sz="3650" dirty="0"/>
-          </a:p>
-        </p:txBody>
-      </p:sp>
-      <p:sp>
-        <p:nvSpPr>
-          <p:cNvPr id="4" name="Shape 1"/>
-          <p:cNvSpPr/>
-          <p:nvPr/>
-        </p:nvSpPr>
-        <p:spPr>
-          <a:xfrm>
-            <a:off x="5442608" y="1961753"/>
-            <a:ext cx="25399" cy="3011785"/>
-          </a:xfrm>
-          <a:prstGeom prst="roundRect">
-            <a:avLst>
-              <a:gd name="adj" fmla="val 50001"/>
-            </a:avLst>
+              <a:t>Week 3: a year sliced down to 202</a:t>
+            </a:r>
+            <a:endParaRPr lang="en-US" sz="1850" dirty="0"/>
+          </a:p>
+        </p:txBody>
+      </p:sp>
+      <p:sp>
+        <p:nvSpPr>
+          <p:cNvPr id="6" name="Text 4"/>
+          <p:cNvSpPr/>
+          <p:nvPr/>
+        </p:nvSpPr>
+        <p:spPr>
+          <a:xfrm>
+            <a:off x="4347359" y="2584053"/>
+            <a:ext cx="378014" cy="236240"/>
+          </a:xfrm>
+          <a:prstGeom prst="rect">
+            <a:avLst/>
+          </a:prstGeom>
+          <a:noFill/>
+          <a:ln/>
+        </p:spPr>
+        <p:txBody>
+          <a:bodyPr wrap="none" lIns="0" tIns="0" rIns="0" bIns="0" rtlCol="0" anchor="ctr"/>
+          <a:lstStyle/>
+          <a:p>
+            <a:pPr algn="l" indent="0" marL="0">
+              <a:lnSpc>
+                <a:spcPct val="100000"/>
+              </a:lnSpc>
+              <a:buNone/>
+            </a:pPr>
+            <a:r>
+              <a:rPr lang="en-US" sz="1450" dirty="0">
+                <a:solidFill>
+                  <a:srgbClr val="1C1C1C"/>
+                </a:solidFill>
+                <a:latin typeface="Orbitron" pitchFamily="34" charset="0"/>
+                <a:ea typeface="Orbitron" pitchFamily="34" charset="-122"/>
+                <a:cs typeface="Orbitron" pitchFamily="34" charset="-120"/>
+              </a:rPr>
+              <a:t>02</a:t>
+            </a:r>
+            <a:endParaRPr lang="en-US" sz="1450" dirty="0"/>
+          </a:p>
+        </p:txBody>
+      </p:sp>
+      <p:sp>
+        <p:nvSpPr>
+          <p:cNvPr id="7" name="Shape 5"/>
+          <p:cNvSpPr/>
+          <p:nvPr/>
+        </p:nvSpPr>
+        <p:spPr>
+          <a:xfrm>
+            <a:off x="4347359" y="2879923"/>
+            <a:ext cx="3496877" cy="25400"/>
+          </a:xfrm>
+          <a:prstGeom prst="rect">
+            <a:avLst/>
           </a:prstGeom>
           <a:solidFill>
-            <a:srgbClr val="B7CBE0"/>
+            <a:srgbClr val="57A1EB"/>
           </a:solidFill>
           <a:ln/>
         </p:spPr>
       </p:sp>
       <p:sp>
         <p:nvSpPr>
-          <p:cNvPr id="5" name="Shape 2"/>
-          <p:cNvSpPr/>
-          <p:nvPr/>
-        </p:nvSpPr>
-        <p:spPr>
-          <a:xfrm>
-            <a:off x="5626505" y="2158305"/>
-            <a:ext cx="558191" cy="25400"/>
-          </a:xfrm>
-          <a:prstGeom prst="roundRect">
-            <a:avLst>
-              <a:gd name="adj" fmla="val 49999"/>
-            </a:avLst>
-          </a:prstGeom>
-          <a:solidFill>
-            <a:srgbClr val="B7CBE0"/>
-          </a:solidFill>
-          <a:ln/>
-        </p:spPr>
-      </p:sp>
-      <p:sp>
-        <p:nvSpPr>
-          <p:cNvPr id="6" name="Shape 3"/>
-          <p:cNvSpPr/>
-          <p:nvPr/>
-        </p:nvSpPr>
-        <p:spPr>
-          <a:xfrm>
-            <a:off x="5233311" y="1961753"/>
-            <a:ext cx="418593" cy="418604"/>
-          </a:xfrm>
-          <a:prstGeom prst="roundRect">
-            <a:avLst>
-              <a:gd name="adj" fmla="val 18669"/>
-            </a:avLst>
-          </a:prstGeom>
-          <a:solidFill>
-            <a:srgbClr val="D1E5FA"/>
-          </a:solidFill>
-          <a:ln w="19050">
-            <a:solidFill>
-              <a:srgbClr val="B7CBE0"/>
-            </a:solidFill>
-            <a:prstDash val="solid"/>
-          </a:ln>
-        </p:spPr>
-      </p:sp>
-      <p:sp>
-        <p:nvSpPr>
-          <p:cNvPr id="7" name="Text 4"/>
-          <p:cNvSpPr/>
-          <p:nvPr/>
-        </p:nvSpPr>
-        <p:spPr>
-          <a:xfrm>
-            <a:off x="5303010" y="1996579"/>
-            <a:ext cx="279095" cy="348853"/>
+          <p:cNvPr id="8" name="Text 6"/>
+          <p:cNvSpPr/>
+          <p:nvPr/>
+        </p:nvSpPr>
+        <p:spPr>
+          <a:xfrm>
+            <a:off x="4347359" y="3025180"/>
+            <a:ext cx="3496877" cy="590550"/>
           </a:xfrm>
           <a:prstGeom prst="rect">
             <a:avLst/>
@@ -5670,17 +6297,19 @@
           <a:ln/>
         </p:spPr>
         <p:txBody>
-          <a:bodyPr wrap="none" lIns="0" tIns="0" rIns="0" bIns="0" rtlCol="0" anchor="ctr"/>
-          <a:lstStyle/>
-          <a:p>
-            <a:pPr algn="ctr" indent="0" marL="0">
-              <a:lnSpc>
-                <a:spcPct val="100000"/>
-              </a:lnSpc>
-              <a:buNone/>
-            </a:pPr>
-            <a:r>
-              <a:rPr lang="en-US" sz="2150" b="1" dirty="0">
+          <a:bodyPr wrap="square" lIns="0" tIns="0" rIns="0" bIns="0" rtlCol="0" anchor="t">
+            <a:normAutofit/>
+          </a:bodyPr>
+          <a:lstStyle/>
+          <a:p>
+            <a:pPr algn="l" indent="0" marL="0">
+              <a:lnSpc>
+                <a:spcPct val="104000"/>
+              </a:lnSpc>
+              <a:buNone/>
+            </a:pPr>
+            <a:r>
+              <a:rPr lang="en-US" sz="1850" b="1" dirty="0">
                 <a:solidFill>
                   <a:srgbClr val="1C1C1C"/>
                 </a:solidFill>
@@ -5688,22 +6317,22 @@
                 <a:ea typeface="Orbitron Bold" pitchFamily="34" charset="-122"/>
                 <a:cs typeface="Orbitron Bold" pitchFamily="34" charset="-120"/>
               </a:rPr>
-              <a:t>1</a:t>
-            </a:r>
-            <a:endParaRPr lang="en-US" sz="2150" dirty="0"/>
-          </a:p>
-        </p:txBody>
-      </p:sp>
-      <p:sp>
-        <p:nvSpPr>
-          <p:cNvPr id="8" name="Text 5"/>
-          <p:cNvSpPr/>
-          <p:nvPr/>
-        </p:nvSpPr>
-        <p:spPr>
-          <a:xfrm>
-            <a:off x="6372959" y="2025650"/>
-            <a:ext cx="5157262" cy="290711"/>
+              <a:t>Week 4: exactly 20 percent battery missed</a:t>
+            </a:r>
+            <a:endParaRPr lang="en-US" sz="1850" dirty="0"/>
+          </a:p>
+        </p:txBody>
+      </p:sp>
+      <p:sp>
+        <p:nvSpPr>
+          <p:cNvPr id="9" name="Text 7"/>
+          <p:cNvSpPr/>
+          <p:nvPr/>
+        </p:nvSpPr>
+        <p:spPr>
+          <a:xfrm>
+            <a:off x="8033244" y="2584053"/>
+            <a:ext cx="378014" cy="236240"/>
           </a:xfrm>
           <a:prstGeom prst="rect">
             <a:avLst/>
@@ -5712,7 +6341,71 @@
           <a:ln/>
         </p:spPr>
         <p:txBody>
-          <a:bodyPr wrap="none" lIns="0" tIns="0" rIns="0" bIns="0" rtlCol="0" anchor="t"/>
+          <a:bodyPr wrap="none" lIns="0" tIns="0" rIns="0" bIns="0" rtlCol="0" anchor="ctr"/>
+          <a:lstStyle/>
+          <a:p>
+            <a:pPr algn="l" indent="0" marL="0">
+              <a:lnSpc>
+                <a:spcPct val="100000"/>
+              </a:lnSpc>
+              <a:buNone/>
+            </a:pPr>
+            <a:r>
+              <a:rPr lang="en-US" sz="1450" dirty="0">
+                <a:solidFill>
+                  <a:srgbClr val="1C1C1C"/>
+                </a:solidFill>
+                <a:latin typeface="Orbitron" pitchFamily="34" charset="0"/>
+                <a:ea typeface="Orbitron" pitchFamily="34" charset="-122"/>
+                <a:cs typeface="Orbitron" pitchFamily="34" charset="-120"/>
+              </a:rPr>
+              <a:t>03</a:t>
+            </a:r>
+            <a:endParaRPr lang="en-US" sz="1450" dirty="0"/>
+          </a:p>
+        </p:txBody>
+      </p:sp>
+      <p:sp>
+        <p:nvSpPr>
+          <p:cNvPr id="10" name="Shape 8"/>
+          <p:cNvSpPr/>
+          <p:nvPr/>
+        </p:nvSpPr>
+        <p:spPr>
+          <a:xfrm>
+            <a:off x="8033244" y="2879923"/>
+            <a:ext cx="3496877" cy="25400"/>
+          </a:xfrm>
+          <a:prstGeom prst="rect">
+            <a:avLst/>
+          </a:prstGeom>
+          <a:solidFill>
+            <a:srgbClr val="57A1EB"/>
+          </a:solidFill>
+          <a:ln/>
+        </p:spPr>
+      </p:sp>
+      <p:sp>
+        <p:nvSpPr>
+          <p:cNvPr id="11" name="Text 9"/>
+          <p:cNvSpPr/>
+          <p:nvPr/>
+        </p:nvSpPr>
+        <p:spPr>
+          <a:xfrm>
+            <a:off x="8033244" y="3025180"/>
+            <a:ext cx="3496877" cy="590550"/>
+          </a:xfrm>
+          <a:prstGeom prst="rect">
+            <a:avLst/>
+          </a:prstGeom>
+          <a:noFill/>
+          <a:ln/>
+        </p:spPr>
+        <p:txBody>
+          <a:bodyPr wrap="square" lIns="0" tIns="0" rIns="0" bIns="0" rtlCol="0" anchor="t">
+            <a:normAutofit/>
+          </a:bodyPr>
           <a:lstStyle/>
           <a:p>
             <a:pPr algn="l" indent="0" marL="0">
@@ -5722,7 +6415,7 @@
               <a:buNone/>
             </a:pPr>
             <a:r>
-              <a:rPr lang="en-US" sz="1800" b="1" dirty="0">
+              <a:rPr lang="en-US" sz="1850" b="1" dirty="0">
                 <a:solidFill>
                   <a:srgbClr val="1C1C1C"/>
                 </a:solidFill>
@@ -5730,22 +6423,22 @@
                 <a:ea typeface="Orbitron Bold" pitchFamily="34" charset="-122"/>
                 <a:cs typeface="Orbitron Bold" pitchFamily="34" charset="-120"/>
               </a:rPr>
-              <a:t>Week 3</a:t>
-            </a:r>
-            <a:endParaRPr lang="en-US" sz="1800" dirty="0"/>
-          </a:p>
-        </p:txBody>
-      </p:sp>
-      <p:sp>
-        <p:nvSpPr>
-          <p:cNvPr id="9" name="Text 6"/>
-          <p:cNvSpPr/>
-          <p:nvPr/>
-        </p:nvSpPr>
-        <p:spPr>
-          <a:xfrm>
-            <a:off x="6372959" y="2426196"/>
-            <a:ext cx="5157262" cy="295275"/>
+              <a:t>Today: a loop one lap short</a:t>
+            </a:r>
+            <a:endParaRPr lang="en-US" sz="1850" dirty="0"/>
+          </a:p>
+        </p:txBody>
+      </p:sp>
+      <p:sp>
+        <p:nvSpPr>
+          <p:cNvPr id="12" name="Text 10"/>
+          <p:cNvSpPr/>
+          <p:nvPr/>
+        </p:nvSpPr>
+        <p:spPr>
+          <a:xfrm>
+            <a:off x="661475" y="3946426"/>
+            <a:ext cx="378014" cy="236240"/>
           </a:xfrm>
           <a:prstGeom prst="rect">
             <a:avLst/>
@@ -5754,12 +6447,12 @@
           <a:ln/>
         </p:spPr>
         <p:txBody>
-          <a:bodyPr wrap="none" lIns="0" tIns="0" rIns="0" bIns="0" rtlCol="0" anchor="t"/>
-          <a:lstStyle/>
-          <a:p>
-            <a:pPr algn="l" indent="0" marL="0">
-              <a:lnSpc>
-                <a:spcPct val="132000"/>
+          <a:bodyPr wrap="none" lIns="0" tIns="0" rIns="0" bIns="0" rtlCol="0" anchor="ctr"/>
+          <a:lstStyle/>
+          <a:p>
+            <a:pPr algn="l" indent="0" marL="0">
+              <a:lnSpc>
+                <a:spcPct val="100000"/>
               </a:lnSpc>
               <a:buNone/>
             </a:pPr>
@@ -5768,11 +6461,11 @@
                 <a:solidFill>
                   <a:srgbClr val="1C1C1C"/>
                 </a:solidFill>
-                <a:latin typeface="Roboto Condensed" pitchFamily="34" charset="0"/>
-                <a:ea typeface="Roboto Condensed" pitchFamily="34" charset="-122"/>
-                <a:cs typeface="Roboto Condensed" pitchFamily="34" charset="-120"/>
-              </a:rPr>
-              <a:t>A year sliced down to 202</a:t>
+                <a:latin typeface="Orbitron" pitchFamily="34" charset="0"/>
+                <a:ea typeface="Orbitron" pitchFamily="34" charset="-122"/>
+                <a:cs typeface="Orbitron" pitchFamily="34" charset="-120"/>
+              </a:rPr>
+              <a:t>04</a:t>
             </a:r>
             <a:endParaRPr lang="en-US" sz="1450" dirty="0"/>
           </a:p>
@@ -5780,63 +6473,34 @@
       </p:sp>
       <p:sp>
         <p:nvSpPr>
-          <p:cNvPr id="10" name="Shape 7"/>
-          <p:cNvSpPr/>
-          <p:nvPr/>
-        </p:nvSpPr>
-        <p:spPr>
-          <a:xfrm>
-            <a:off x="5626505" y="3284339"/>
-            <a:ext cx="558191" cy="25400"/>
-          </a:xfrm>
-          <a:prstGeom prst="roundRect">
-            <a:avLst>
-              <a:gd name="adj" fmla="val 49999"/>
-            </a:avLst>
+          <p:cNvPr id="13" name="Shape 11"/>
+          <p:cNvSpPr/>
+          <p:nvPr/>
+        </p:nvSpPr>
+        <p:spPr>
+          <a:xfrm>
+            <a:off x="661475" y="4242296"/>
+            <a:ext cx="5339820" cy="25400"/>
+          </a:xfrm>
+          <a:prstGeom prst="rect">
+            <a:avLst/>
           </a:prstGeom>
           <a:solidFill>
-            <a:srgbClr val="B7CBE0"/>
+            <a:srgbClr val="57A1EB"/>
           </a:solidFill>
           <a:ln/>
         </p:spPr>
       </p:sp>
       <p:sp>
         <p:nvSpPr>
-          <p:cNvPr id="11" name="Shape 8"/>
-          <p:cNvSpPr/>
-          <p:nvPr/>
-        </p:nvSpPr>
-        <p:spPr>
-          <a:xfrm>
-            <a:off x="5233311" y="3087787"/>
-            <a:ext cx="418593" cy="418604"/>
-          </a:xfrm>
-          <a:prstGeom prst="roundRect">
-            <a:avLst>
-              <a:gd name="adj" fmla="val 18669"/>
-            </a:avLst>
-          </a:prstGeom>
-          <a:solidFill>
-            <a:srgbClr val="D1E5FA"/>
-          </a:solidFill>
-          <a:ln w="19050">
-            <a:solidFill>
-              <a:srgbClr val="B7CBE0"/>
-            </a:solidFill>
-            <a:prstDash val="solid"/>
-          </a:ln>
-        </p:spPr>
-      </p:sp>
-      <p:sp>
-        <p:nvSpPr>
-          <p:cNvPr id="12" name="Text 9"/>
-          <p:cNvSpPr/>
-          <p:nvPr/>
-        </p:nvSpPr>
-        <p:spPr>
-          <a:xfrm>
-            <a:off x="5303010" y="3122613"/>
-            <a:ext cx="279095" cy="348853"/>
+          <p:cNvPr id="14" name="Text 12"/>
+          <p:cNvSpPr/>
+          <p:nvPr/>
+        </p:nvSpPr>
+        <p:spPr>
+          <a:xfrm>
+            <a:off x="661475" y="4387552"/>
+            <a:ext cx="5339820" cy="590550"/>
           </a:xfrm>
           <a:prstGeom prst="rect">
             <a:avLst/>
@@ -5845,17 +6509,19 @@
           <a:ln/>
         </p:spPr>
         <p:txBody>
-          <a:bodyPr wrap="none" lIns="0" tIns="0" rIns="0" bIns="0" rtlCol="0" anchor="ctr"/>
-          <a:lstStyle/>
-          <a:p>
-            <a:pPr algn="ctr" indent="0" marL="0">
-              <a:lnSpc>
-                <a:spcPct val="100000"/>
-              </a:lnSpc>
-              <a:buNone/>
-            </a:pPr>
-            <a:r>
-              <a:rPr lang="en-US" sz="2150" b="1" dirty="0">
+          <a:bodyPr wrap="square" lIns="0" tIns="0" rIns="0" bIns="0" rtlCol="0" anchor="t">
+            <a:normAutofit/>
+          </a:bodyPr>
+          <a:lstStyle/>
+          <a:p>
+            <a:pPr algn="l" indent="0" marL="0">
+              <a:lnSpc>
+                <a:spcPct val="104000"/>
+              </a:lnSpc>
+              <a:buNone/>
+            </a:pPr>
+            <a:r>
+              <a:rPr lang="en-US" sz="1850" b="1" dirty="0">
                 <a:solidFill>
                   <a:srgbClr val="1C1C1C"/>
                 </a:solidFill>
@@ -5863,22 +6529,22 @@
                 <a:ea typeface="Orbitron Bold" pitchFamily="34" charset="-122"/>
                 <a:cs typeface="Orbitron Bold" pitchFamily="34" charset="-120"/>
               </a:rPr>
-              <a:t>2</a:t>
-            </a:r>
-            <a:endParaRPr lang="en-US" sz="2150" dirty="0"/>
-          </a:p>
-        </p:txBody>
-      </p:sp>
-      <p:sp>
-        <p:nvSpPr>
-          <p:cNvPr id="13" name="Text 10"/>
-          <p:cNvSpPr/>
-          <p:nvPr/>
-        </p:nvSpPr>
-        <p:spPr>
-          <a:xfrm>
-            <a:off x="6372959" y="3151684"/>
-            <a:ext cx="5157262" cy="290711"/>
+              <a:t>Same bug: a boundary with the wrong comparison</a:t>
+            </a:r>
+            <a:endParaRPr lang="en-US" sz="1850" dirty="0"/>
+          </a:p>
+        </p:txBody>
+      </p:sp>
+      <p:sp>
+        <p:nvSpPr>
+          <p:cNvPr id="15" name="Text 13"/>
+          <p:cNvSpPr/>
+          <p:nvPr/>
+        </p:nvSpPr>
+        <p:spPr>
+          <a:xfrm>
+            <a:off x="6190301" y="3946426"/>
+            <a:ext cx="378014" cy="236240"/>
           </a:xfrm>
           <a:prstGeom prst="rect">
             <a:avLst/>
@@ -5887,6 +6553,68 @@
           <a:ln/>
         </p:spPr>
         <p:txBody>
+          <a:bodyPr wrap="none" lIns="0" tIns="0" rIns="0" bIns="0" rtlCol="0" anchor="ctr"/>
+          <a:lstStyle/>
+          <a:p>
+            <a:pPr algn="l" indent="0" marL="0">
+              <a:lnSpc>
+                <a:spcPct val="100000"/>
+              </a:lnSpc>
+              <a:buNone/>
+            </a:pPr>
+            <a:r>
+              <a:rPr lang="en-US" sz="1450" dirty="0">
+                <a:solidFill>
+                  <a:srgbClr val="1C1C1C"/>
+                </a:solidFill>
+                <a:latin typeface="Orbitron" pitchFamily="34" charset="0"/>
+                <a:ea typeface="Orbitron" pitchFamily="34" charset="-122"/>
+                <a:cs typeface="Orbitron" pitchFamily="34" charset="-120"/>
+              </a:rPr>
+              <a:t>05</a:t>
+            </a:r>
+            <a:endParaRPr lang="en-US" sz="1450" dirty="0"/>
+          </a:p>
+        </p:txBody>
+      </p:sp>
+      <p:sp>
+        <p:nvSpPr>
+          <p:cNvPr id="16" name="Shape 14"/>
+          <p:cNvSpPr/>
+          <p:nvPr/>
+        </p:nvSpPr>
+        <p:spPr>
+          <a:xfrm>
+            <a:off x="6190301" y="4242296"/>
+            <a:ext cx="5339820" cy="25400"/>
+          </a:xfrm>
+          <a:prstGeom prst="rect">
+            <a:avLst/>
+          </a:prstGeom>
+          <a:solidFill>
+            <a:srgbClr val="57A1EB"/>
+          </a:solidFill>
+          <a:ln/>
+        </p:spPr>
+      </p:sp>
+      <p:sp>
+        <p:nvSpPr>
+          <p:cNvPr id="17" name="Text 15"/>
+          <p:cNvSpPr/>
+          <p:nvPr/>
+        </p:nvSpPr>
+        <p:spPr>
+          <a:xfrm>
+            <a:off x="6190301" y="4387552"/>
+            <a:ext cx="5339820" cy="295275"/>
+          </a:xfrm>
+          <a:prstGeom prst="rect">
+            <a:avLst/>
+          </a:prstGeom>
+          <a:noFill/>
+          <a:ln/>
+        </p:spPr>
+        <p:txBody>
           <a:bodyPr wrap="none" lIns="0" tIns="0" rIns="0" bIns="0" rtlCol="0" anchor="t"/>
           <a:lstStyle/>
           <a:p>
@@ -5897,7 +6625,7 @@
               <a:buNone/>
             </a:pPr>
             <a:r>
-              <a:rPr lang="en-US" sz="1800" b="1" dirty="0">
+              <a:rPr lang="en-US" sz="1850" b="1" dirty="0">
                 <a:solidFill>
                   <a:srgbClr val="1C1C1C"/>
                 </a:solidFill>
@@ -5905,328 +6633,21 @@
                 <a:ea typeface="Orbitron Bold" pitchFamily="34" charset="-122"/>
                 <a:cs typeface="Orbitron Bold" pitchFamily="34" charset="-120"/>
               </a:rPr>
-              <a:t>Week 4</a:t>
-            </a:r>
-            <a:endParaRPr lang="en-US" sz="1800" dirty="0"/>
-          </a:p>
-        </p:txBody>
-      </p:sp>
-      <p:sp>
-        <p:nvSpPr>
-          <p:cNvPr id="14" name="Text 11"/>
-          <p:cNvSpPr/>
-          <p:nvPr/>
-        </p:nvSpPr>
-        <p:spPr>
-          <a:xfrm>
-            <a:off x="6372959" y="3552230"/>
-            <a:ext cx="5157262" cy="295275"/>
-          </a:xfrm>
-          <a:prstGeom prst="rect">
-            <a:avLst/>
-          </a:prstGeom>
-          <a:noFill/>
-          <a:ln/>
-        </p:spPr>
-        <p:txBody>
-          <a:bodyPr wrap="none" lIns="0" tIns="0" rIns="0" bIns="0" rtlCol="0" anchor="t"/>
-          <a:lstStyle/>
-          <a:p>
-            <a:pPr algn="l" indent="0" marL="0">
-              <a:lnSpc>
-                <a:spcPct val="132000"/>
-              </a:lnSpc>
-              <a:buNone/>
-            </a:pPr>
-            <a:r>
-              <a:rPr lang="en-US" sz="1450" dirty="0">
-                <a:solidFill>
-                  <a:srgbClr val="1C1C1C"/>
-                </a:solidFill>
-                <a:latin typeface="Roboto Condensed" pitchFamily="34" charset="0"/>
-                <a:ea typeface="Roboto Condensed" pitchFamily="34" charset="-122"/>
-                <a:cs typeface="Roboto Condensed" pitchFamily="34" charset="-120"/>
-              </a:rPr>
-              <a:t>Exactly 20 percent battery missed</a:t>
-            </a:r>
-            <a:endParaRPr lang="en-US" sz="1450" dirty="0"/>
-          </a:p>
-        </p:txBody>
-      </p:sp>
-      <p:sp>
-        <p:nvSpPr>
-          <p:cNvPr id="15" name="Shape 12"/>
-          <p:cNvSpPr/>
-          <p:nvPr/>
-        </p:nvSpPr>
-        <p:spPr>
-          <a:xfrm>
-            <a:off x="5626505" y="4410373"/>
-            <a:ext cx="558191" cy="25400"/>
-          </a:xfrm>
-          <a:prstGeom prst="roundRect">
-            <a:avLst>
-              <a:gd name="adj" fmla="val 49999"/>
-            </a:avLst>
-          </a:prstGeom>
-          <a:solidFill>
-            <a:srgbClr val="B7CBE0"/>
-          </a:solidFill>
-          <a:ln/>
-        </p:spPr>
-      </p:sp>
-      <p:sp>
-        <p:nvSpPr>
-          <p:cNvPr id="16" name="Shape 13"/>
-          <p:cNvSpPr/>
-          <p:nvPr/>
-        </p:nvSpPr>
-        <p:spPr>
-          <a:xfrm>
-            <a:off x="5233311" y="4213820"/>
-            <a:ext cx="418593" cy="418604"/>
-          </a:xfrm>
-          <a:prstGeom prst="roundRect">
-            <a:avLst>
-              <a:gd name="adj" fmla="val 18669"/>
-            </a:avLst>
-          </a:prstGeom>
-          <a:solidFill>
-            <a:srgbClr val="D1E5FA"/>
-          </a:solidFill>
-          <a:ln w="19050">
-            <a:solidFill>
-              <a:srgbClr val="B7CBE0"/>
-            </a:solidFill>
-            <a:prstDash val="solid"/>
-          </a:ln>
-        </p:spPr>
-      </p:sp>
-      <p:sp>
-        <p:nvSpPr>
-          <p:cNvPr id="17" name="Text 14"/>
-          <p:cNvSpPr/>
-          <p:nvPr/>
-        </p:nvSpPr>
-        <p:spPr>
-          <a:xfrm>
-            <a:off x="5303010" y="4248646"/>
-            <a:ext cx="279095" cy="348853"/>
-          </a:xfrm>
-          <a:prstGeom prst="rect">
-            <a:avLst/>
-          </a:prstGeom>
-          <a:noFill/>
-          <a:ln/>
-        </p:spPr>
-        <p:txBody>
-          <a:bodyPr wrap="none" lIns="0" tIns="0" rIns="0" bIns="0" rtlCol="0" anchor="ctr"/>
-          <a:lstStyle/>
-          <a:p>
-            <a:pPr algn="ctr" indent="0" marL="0">
-              <a:lnSpc>
-                <a:spcPct val="100000"/>
-              </a:lnSpc>
-              <a:buNone/>
-            </a:pPr>
-            <a:r>
-              <a:rPr lang="en-US" sz="2150" b="1" dirty="0">
-                <a:solidFill>
-                  <a:srgbClr val="1C1C1C"/>
-                </a:solidFill>
-                <a:latin typeface="Orbitron Bold" pitchFamily="34" charset="0"/>
-                <a:ea typeface="Orbitron Bold" pitchFamily="34" charset="-122"/>
-                <a:cs typeface="Orbitron Bold" pitchFamily="34" charset="-120"/>
-              </a:rPr>
-              <a:t>3</a:t>
-            </a:r>
-            <a:endParaRPr lang="en-US" sz="2150" dirty="0"/>
-          </a:p>
-        </p:txBody>
-      </p:sp>
-      <p:sp>
-        <p:nvSpPr>
-          <p:cNvPr id="18" name="Text 15"/>
-          <p:cNvSpPr/>
-          <p:nvPr/>
-        </p:nvSpPr>
-        <p:spPr>
-          <a:xfrm>
-            <a:off x="6372959" y="4277717"/>
-            <a:ext cx="5157262" cy="290711"/>
-          </a:xfrm>
-          <a:prstGeom prst="rect">
-            <a:avLst/>
-          </a:prstGeom>
-          <a:noFill/>
-          <a:ln/>
-        </p:spPr>
-        <p:txBody>
-          <a:bodyPr wrap="none" lIns="0" tIns="0" rIns="0" bIns="0" rtlCol="0" anchor="t"/>
-          <a:lstStyle/>
-          <a:p>
-            <a:pPr algn="l" indent="0" marL="0">
-              <a:lnSpc>
-                <a:spcPct val="104000"/>
-              </a:lnSpc>
-              <a:buNone/>
-            </a:pPr>
-            <a:r>
-              <a:rPr lang="en-US" sz="1800" b="1" dirty="0">
-                <a:solidFill>
-                  <a:srgbClr val="1C1C1C"/>
-                </a:solidFill>
-                <a:latin typeface="Orbitron Bold" pitchFamily="34" charset="0"/>
-                <a:ea typeface="Orbitron Bold" pitchFamily="34" charset="-122"/>
-                <a:cs typeface="Orbitron Bold" pitchFamily="34" charset="-120"/>
-              </a:rPr>
-              <a:t>Today</a:t>
-            </a:r>
-            <a:endParaRPr lang="en-US" sz="1800" dirty="0"/>
-          </a:p>
-        </p:txBody>
-      </p:sp>
-      <p:sp>
-        <p:nvSpPr>
-          <p:cNvPr id="19" name="Text 16"/>
-          <p:cNvSpPr/>
-          <p:nvPr/>
-        </p:nvSpPr>
-        <p:spPr>
-          <a:xfrm>
-            <a:off x="6372959" y="4678263"/>
-            <a:ext cx="5157262" cy="295275"/>
-          </a:xfrm>
-          <a:prstGeom prst="rect">
-            <a:avLst/>
-          </a:prstGeom>
-          <a:noFill/>
-          <a:ln/>
-        </p:spPr>
-        <p:txBody>
-          <a:bodyPr wrap="none" lIns="0" tIns="0" rIns="0" bIns="0" rtlCol="0" anchor="t"/>
-          <a:lstStyle/>
-          <a:p>
-            <a:pPr algn="l" indent="0" marL="0">
-              <a:lnSpc>
-                <a:spcPct val="132000"/>
-              </a:lnSpc>
-              <a:buNone/>
-            </a:pPr>
-            <a:r>
-              <a:rPr lang="en-US" sz="1450" dirty="0">
-                <a:solidFill>
-                  <a:srgbClr val="1C1C1C"/>
-                </a:solidFill>
-                <a:latin typeface="Roboto Condensed" pitchFamily="34" charset="0"/>
-                <a:ea typeface="Roboto Condensed" pitchFamily="34" charset="-122"/>
-                <a:cs typeface="Roboto Condensed" pitchFamily="34" charset="-120"/>
-              </a:rPr>
-              <a:t>A loop one lap short</a:t>
-            </a:r>
-            <a:endParaRPr lang="en-US" sz="1450" dirty="0"/>
-          </a:p>
-        </p:txBody>
-      </p:sp>
-      <p:sp>
-        <p:nvSpPr>
-          <p:cNvPr id="20" name="Shape 17"/>
-          <p:cNvSpPr/>
-          <p:nvPr/>
-        </p:nvSpPr>
-        <p:spPr>
-          <a:xfrm>
-            <a:off x="5233360" y="5179516"/>
-            <a:ext cx="6296860" cy="1031379"/>
-          </a:xfrm>
-          <a:prstGeom prst="roundRect">
-            <a:avLst>
-              <a:gd name="adj" fmla="val 7577"/>
-            </a:avLst>
-          </a:prstGeom>
-          <a:solidFill>
-            <a:srgbClr val="D1E5FA"/>
-          </a:solidFill>
-          <a:ln/>
-        </p:spPr>
-      </p:sp>
-      <p:pic>
-        <p:nvPicPr>
-          <p:cNvPr id="21" name="Image 1" descr="preencoded.png">    </p:cNvPr>
-          <p:cNvPicPr>
-            <a:picLocks noChangeAspect="1"/>
-          </p:cNvPicPr>
-          <p:nvPr/>
-        </p:nvPicPr>
-        <p:blipFill>
-          <a:blip r:embed="rId2"/>
-          <a:stretch>
-            <a:fillRect/>
-          </a:stretch>
-        </p:blipFill>
-        <p:spPr>
-          <a:xfrm>
-            <a:off x="5419391" y="5443141"/>
-            <a:ext cx="232563" cy="186035"/>
-          </a:xfrm>
-          <a:prstGeom prst="rect">
-            <a:avLst/>
-          </a:prstGeom>
-        </p:spPr>
-      </p:pic>
-      <p:sp>
-        <p:nvSpPr>
-          <p:cNvPr id="22" name="Text 18"/>
-          <p:cNvSpPr/>
-          <p:nvPr/>
-        </p:nvSpPr>
-        <p:spPr>
-          <a:xfrm>
-            <a:off x="5837984" y="5409109"/>
-            <a:ext cx="5506205" cy="590550"/>
-          </a:xfrm>
-          <a:prstGeom prst="rect">
-            <a:avLst/>
-          </a:prstGeom>
-          <a:noFill/>
-          <a:ln/>
-        </p:spPr>
-        <p:txBody>
-          <a:bodyPr wrap="square" lIns="0" tIns="0" rIns="0" bIns="0" rtlCol="0" anchor="t">
-            <a:normAutofit/>
-          </a:bodyPr>
-          <a:lstStyle/>
-          <a:p>
-            <a:pPr algn="l" indent="0" marL="0">
-              <a:lnSpc>
-                <a:spcPct val="132000"/>
-              </a:lnSpc>
-              <a:buNone/>
-            </a:pPr>
-            <a:r>
-              <a:rPr lang="en-US" sz="1450" dirty="0">
-                <a:solidFill>
-                  <a:srgbClr val="000000"/>
-                </a:solidFill>
-                <a:latin typeface="Roboto Condensed" pitchFamily="34" charset="0"/>
-                <a:ea typeface="Roboto Condensed" pitchFamily="34" charset="-122"/>
-                <a:cs typeface="Roboto Condensed" pitchFamily="34" charset="-120"/>
-              </a:rPr>
-              <a:t>Same bug: a boundary with the wrong comparison. None of them crashed.</a:t>
-            </a:r>
-            <a:endParaRPr lang="en-US" sz="1450" dirty="0"/>
-          </a:p>
-        </p:txBody>
-      </p:sp>
-      <p:sp>
-        <p:nvSpPr>
-          <p:cNvPr id="23" name="Text 19"/>
-          <p:cNvSpPr/>
-          <p:nvPr/>
-        </p:nvSpPr>
-        <p:spPr>
-          <a:xfrm>
-            <a:off x="4704141" y="6457255"/>
+              <a:t>None of them crashed</a:t>
+            </a:r>
+            <a:endParaRPr lang="en-US" sz="1850" dirty="0"/>
+          </a:p>
+        </p:txBody>
+      </p:sp>
+      <p:sp>
+        <p:nvSpPr>
+          <p:cNvPr id="18" name="Text 16"/>
+          <p:cNvSpPr/>
+          <p:nvPr/>
+        </p:nvSpPr>
+        <p:spPr>
+          <a:xfrm>
+            <a:off x="132255" y="6457255"/>
             <a:ext cx="3640642" cy="158750"/>
           </a:xfrm>
           <a:prstGeom prst="rect">
